--- a/PACOS_How_To_Use.pptx
+++ b/PACOS_How_To_Use.pptx
@@ -16,6 +16,7 @@
     <p:sldId id="264" r:id="rId15"/>
     <p:sldId id="265" r:id="rId16"/>
     <p:sldId id="266" r:id="rId17"/>
+    <p:sldId id="272" r:id="rId23"/>
     <p:sldId id="267" r:id="rId18"/>
     <p:sldId id="268" r:id="rId19"/>
     <p:sldId id="269" r:id="rId20"/>
@@ -3419,7 +3420,7 @@
                 </a:solidFill>
                 <a:latin typeface="Segoe UI"/>
               </a:rPr>
-              <a:t>Multi-agent (LangGraph)  ·  Nemotron  ·  SQLite  ·  React + FastAPI  ·  human-in-the-loop</a:t>
+              <a:t>Multi-agent (LangGraph)  ·  Nemotron  ·  SQLite  ·  React + FastAPI  ·  human-in-the-loop  ·  one-click exe</a:t>
             </a:r>
           </a:p>
         </p:txBody>
@@ -4830,25 +4831,23 @@
                 </a:solidFill>
                 <a:latin typeface="Segoe UI"/>
               </a:rPr>
-              <a:t>•  </a:t>
-            </a:r>
+              <a:t>•  Pipeline table — every lead with status, dates, channel, reply intent, follow-up due.</a:t>
+            </a:r>
+          </a:p>
+          <a:p>
+            <a:pPr algn="l">
+              <a:lnSpc>
+                <a:spcPct val="105000"/>
+              </a:lnSpc>
+            </a:pPr>
             <a:r>
               <a:rPr sz="1350" b="1">
                 <a:solidFill>
-                  <a:srgbClr val="1A1A2E"/>
-                </a:solidFill>
-                <a:latin typeface="Segoe UI"/>
-              </a:rPr>
-              <a:t>Pipeline table </a:t>
-            </a:r>
-            <a:r>
-              <a:rPr sz="1350" b="0">
-                <a:solidFill>
-                  <a:srgbClr val="1A1A2E"/>
-                </a:solidFill>
-                <a:latin typeface="Segoe UI"/>
-              </a:rPr>
-              <a:t>— every lead in the pipeline with status, dates, channel, reply intent, and follow-up due.</a:t>
+                  <a:srgbClr val="E84A2F"/>
+                </a:solidFill>
+                <a:latin typeface="Segoe UI"/>
+              </a:rPr>
+              <a:t>•  Inline status — change any lead's status from a dropdown.</a:t>
             </a:r>
           </a:p>
           <a:p>
@@ -4856,12 +4855,6 @@
               <a:lnSpc>
                 <a:spcPct val="105000"/>
               </a:lnSpc>
-              <a:spcBef>
-                <a:spcPts val="0"/>
-              </a:spcBef>
-              <a:spcAft>
-                <a:spcPts val="1200"/>
-              </a:spcAft>
             </a:pPr>
             <a:r>
               <a:rPr sz="1350" b="1">
@@ -4870,25 +4863,23 @@
                 </a:solidFill>
                 <a:latin typeface="Segoe UI"/>
               </a:rPr>
-              <a:t>•  </a:t>
-            </a:r>
+              <a:t>•  Scan inbox — one click runs the read-only Gmail scan: replies matched to leads, the rest queued as unmatched (needs the one-time Gmail setup).</a:t>
+            </a:r>
+          </a:p>
+          <a:p>
+            <a:pPr algn="l">
+              <a:lnSpc>
+                <a:spcPct val="105000"/>
+              </a:lnSpc>
+            </a:pPr>
             <a:r>
               <a:rPr sz="1350" b="1">
                 <a:solidFill>
-                  <a:srgbClr val="1A1A2E"/>
-                </a:solidFill>
-                <a:latin typeface="Segoe UI"/>
-              </a:rPr>
-              <a:t>Inline status </a:t>
-            </a:r>
-            <a:r>
-              <a:rPr sz="1350" b="0">
-                <a:solidFill>
-                  <a:srgbClr val="1A1A2E"/>
-                </a:solidFill>
-                <a:latin typeface="Segoe UI"/>
-              </a:rPr>
-              <a:t>— change any lead's status from a dropdown.</a:t>
+                  <a:srgbClr val="E84A2F"/>
+                </a:solidFill>
+                <a:latin typeface="Segoe UI"/>
+              </a:rPr>
+              <a:t>•  Daily digest — interviews, warm leads, follow-ups due, unmatched replies, job alerts.</a:t>
             </a:r>
           </a:p>
           <a:p>
@@ -4896,12 +4887,6 @@
               <a:lnSpc>
                 <a:spcPct val="105000"/>
               </a:lnSpc>
-              <a:spcBef>
-                <a:spcPts val="0"/>
-              </a:spcBef>
-              <a:spcAft>
-                <a:spcPts val="1200"/>
-              </a:spcAft>
             </a:pPr>
             <a:r>
               <a:rPr sz="1350" b="1">
@@ -4910,65 +4895,7 @@
                 </a:solidFill>
                 <a:latin typeface="Segoe UI"/>
               </a:rPr>
-              <a:t>•  </a:t>
-            </a:r>
-            <a:r>
-              <a:rPr sz="1350" b="1">
-                <a:solidFill>
-                  <a:srgbClr val="1A1A2E"/>
-                </a:solidFill>
-                <a:latin typeface="Segoe UI"/>
-              </a:rPr>
-              <a:t>Daily digest </a:t>
-            </a:r>
-            <a:r>
-              <a:rPr sz="1350" b="0">
-                <a:solidFill>
-                  <a:srgbClr val="1A1A2E"/>
-                </a:solidFill>
-                <a:latin typeface="Segoe UI"/>
-              </a:rPr>
-              <a:t>— the same summary you'd read each morning: interviews, warm leads, follow-ups due, unmatched replies, new job alerts.</a:t>
-            </a:r>
-          </a:p>
-          <a:p>
-            <a:pPr algn="l">
-              <a:lnSpc>
-                <a:spcPct val="105000"/>
-              </a:lnSpc>
-              <a:spcBef>
-                <a:spcPts val="0"/>
-              </a:spcBef>
-              <a:spcAft>
-                <a:spcPts val="1200"/>
-              </a:spcAft>
-            </a:pPr>
-            <a:r>
-              <a:rPr sz="1350" b="1">
-                <a:solidFill>
-                  <a:srgbClr val="E84A2F"/>
-                </a:solidFill>
-                <a:latin typeface="Segoe UI"/>
-              </a:rPr>
-              <a:t>•  </a:t>
-            </a:r>
-            <a:r>
-              <a:rPr sz="1350" b="1">
-                <a:solidFill>
-                  <a:srgbClr val="1A1A2E"/>
-                </a:solidFill>
-                <a:latin typeface="Segoe UI"/>
-              </a:rPr>
-              <a:t>Export anytime </a:t>
-            </a:r>
-            <a:r>
-              <a:rPr sz="1350" b="0">
-                <a:solidFill>
-                  <a:srgbClr val="1A1A2E"/>
-                </a:solidFill>
-                <a:latin typeface="Segoe UI"/>
-              </a:rPr>
-              <a:t>— pacos export writes tracker.csv for Excel/Sheets.</a:t>
+              <a:t>•  Export anytime — pacos export writes tracker.csv for Excel/Sheets.</a:t>
             </a:r>
           </a:p>
         </p:txBody>
@@ -5518,7 +5445,7 @@
                 </a:solidFill>
                 <a:latin typeface="Segoe UI"/>
               </a:rPr>
-              <a:t>LAYER 2</a:t>
+              <a:t>USING THE APP · TAB 6</a:t>
             </a:r>
           </a:p>
         </p:txBody>
@@ -5563,7 +5490,7 @@
                 </a:solidFill>
                 <a:latin typeface="Segoe UI"/>
               </a:rPr>
-              <a:t>The Inbox Monitor (optional)</a:t>
+              <a:t>Chat — Ask, Draft &amp; Capture</a:t>
             </a:r>
           </a:p>
         </p:txBody>
@@ -5666,8 +5593,8 @@
         </p:nvSpPr>
         <p:spPr>
           <a:xfrm>
-            <a:off x="548640" y="1280160"/>
-            <a:ext cx="10972800" cy="457200"/>
+            <a:off x="548640" y="1371600"/>
+            <a:ext cx="5577840" cy="4114800"/>
           </a:xfrm>
           <a:prstGeom prst="rect">
             <a:avLst/>
@@ -5682,51 +5609,6 @@
           <a:p>
             <a:pPr algn="l">
               <a:lnSpc>
-                <a:spcPct val="110000"/>
-              </a:lnSpc>
-              <a:spcBef>
-                <a:spcPts val="0"/>
-              </a:spcBef>
-              <a:spcAft>
-                <a:spcPts val="400"/>
-              </a:spcAft>
-            </a:pPr>
-            <a:r>
-              <a:rPr sz="1400" b="0">
-                <a:solidFill>
-                  <a:srgbClr val="6B6B7B"/>
-                </a:solidFill>
-                <a:latin typeface="Segoe UI"/>
-              </a:rPr>
-              <a:t>Read-only Gmail. It turns your inbox into structured signal — and never sends, deletes, or labels anything.</a:t>
-            </a:r>
-          </a:p>
-        </p:txBody>
-      </p:sp>
-      <p:sp>
-        <p:nvSpPr>
-          <p:cNvPr id="10" name="TextBox 9"/>
-          <p:cNvSpPr txBox="1"/>
-          <p:nvPr/>
-        </p:nvSpPr>
-        <p:spPr>
-          <a:xfrm>
-            <a:off x="548640" y="1920240"/>
-            <a:ext cx="5577840" cy="2743200"/>
-          </a:xfrm>
-          <a:prstGeom prst="rect">
-            <a:avLst/>
-          </a:prstGeom>
-          <a:noFill/>
-        </p:spPr>
-        <p:txBody>
-          <a:bodyPr wrap="square" anchor="t" lIns="0" rIns="0" tIns="0" bIns="0">
-            <a:spAutoFit/>
-          </a:bodyPr>
-          <a:lstStyle/>
-          <a:p>
-            <a:pPr algn="l">
-              <a:lnSpc>
                 <a:spcPct val="105000"/>
               </a:lnSpc>
               <a:spcBef>
@@ -5743,25 +5625,23 @@
                 </a:solidFill>
                 <a:latin typeface="Segoe UI"/>
               </a:rPr>
-              <a:t>•  </a:t>
-            </a:r>
+              <a:t>•  Ask anything — the assistant knows your live pipeline stats (leads, statuses, follow-ups due).</a:t>
+            </a:r>
+          </a:p>
+          <a:p>
+            <a:pPr algn="l">
+              <a:lnSpc>
+                <a:spcPct val="105000"/>
+              </a:lnSpc>
+            </a:pPr>
             <a:r>
               <a:rPr sz="1350" b="1">
                 <a:solidFill>
-                  <a:srgbClr val="1A1A2E"/>
-                </a:solidFill>
-                <a:latin typeface="Segoe UI"/>
-              </a:rPr>
-              <a:t>One-time setup </a:t>
-            </a:r>
-            <a:r>
-              <a:rPr sz="1350" b="0">
-                <a:solidFill>
-                  <a:srgbClr val="1A1A2E"/>
-                </a:solidFill>
-                <a:latin typeface="Segoe UI"/>
-              </a:rPr>
-              <a:t>— create OAuth credentials in Google Cloud, then run the auth script once.</a:t>
+                  <a:srgbClr val="E84A2F"/>
+                </a:solidFill>
+                <a:latin typeface="Segoe UI"/>
+              </a:rPr>
+              <a:t>•  Draft outreach — workshop wording before you paste it anywhere.</a:t>
             </a:r>
           </a:p>
           <a:p>
@@ -5769,12 +5649,6 @@
               <a:lnSpc>
                 <a:spcPct val="105000"/>
               </a:lnSpc>
-              <a:spcBef>
-                <a:spcPts val="0"/>
-              </a:spcBef>
-              <a:spcAft>
-                <a:spcPts val="1100"/>
-              </a:spcAft>
             </a:pPr>
             <a:r>
               <a:rPr sz="1350" b="1">
@@ -5783,25 +5657,23 @@
                 </a:solidFill>
                 <a:latin typeface="Segoe UI"/>
               </a:rPr>
-              <a:t>•  </a:t>
-            </a:r>
+              <a:t>•  Capture a lead — describe a person or paste a JD; a ‘Proposed lead’ card appears with editable fields and a persona dropdown.</a:t>
+            </a:r>
+          </a:p>
+          <a:p>
+            <a:pPr algn="l">
+              <a:lnSpc>
+                <a:spcPct val="105000"/>
+              </a:lnSpc>
+            </a:pPr>
             <a:r>
               <a:rPr sz="1350" b="1">
                 <a:solidFill>
-                  <a:srgbClr val="1A1A2E"/>
-                </a:solidFill>
-                <a:latin typeface="Segoe UI"/>
-              </a:rPr>
-              <a:t>Job alerts </a:t>
-            </a:r>
-            <a:r>
-              <a:rPr sz="1350" b="0">
-                <a:solidFill>
-                  <a:srgbClr val="1A1A2E"/>
-                </a:solidFill>
-                <a:latin typeface="Segoe UI"/>
-              </a:rPr>
-              <a:t>— LinkedIn / Naukri alert emails append to new_jobs.csv.</a:t>
+                  <a:srgbClr val="E84A2F"/>
+                </a:solidFill>
+                <a:latin typeface="Segoe UI"/>
+              </a:rPr>
+              <a:t>•  You confirm — the card writes to leads.csv only when you click Add. The chat itself can never write.</a:t>
             </a:r>
           </a:p>
           <a:p>
@@ -5809,12 +5681,6 @@
               <a:lnSpc>
                 <a:spcPct val="105000"/>
               </a:lnSpc>
-              <a:spcBef>
-                <a:spcPts val="0"/>
-              </a:spcBef>
-              <a:spcAft>
-                <a:spcPts val="1100"/>
-              </a:spcAft>
             </a:pPr>
             <a:r>
               <a:rPr sz="1350" b="1">
@@ -5823,79 +5689,21 @@
                 </a:solidFill>
                 <a:latin typeface="Segoe UI"/>
               </a:rPr>
-              <a:t>•  </a:t>
-            </a:r>
-            <a:r>
-              <a:rPr sz="1350" b="1">
-                <a:solidFill>
-                  <a:srgbClr val="1A1A2E"/>
-                </a:solidFill>
-                <a:latin typeface="Segoe UI"/>
-              </a:rPr>
-              <a:t>Replies (exact match) </a:t>
-            </a:r>
-            <a:r>
-              <a:rPr sz="1350" b="0">
-                <a:solidFill>
-                  <a:srgbClr val="1A1A2E"/>
-                </a:solidFill>
-                <a:latin typeface="Segoe UI"/>
-              </a:rPr>
-              <a:t>— a reply updates a lead only if the sender email equals that lead's email.</a:t>
-            </a:r>
-          </a:p>
-          <a:p>
-            <a:pPr algn="l">
-              <a:lnSpc>
-                <a:spcPct val="105000"/>
-              </a:lnSpc>
-              <a:spcBef>
-                <a:spcPts val="0"/>
-              </a:spcBef>
-              <a:spcAft>
-                <a:spcPts val="1100"/>
-              </a:spcAft>
-            </a:pPr>
-            <a:r>
-              <a:rPr sz="1350" b="1">
-                <a:solidFill>
-                  <a:srgbClr val="E84A2F"/>
-                </a:solidFill>
-                <a:latin typeface="Segoe UI"/>
-              </a:rPr>
-              <a:t>•  </a:t>
-            </a:r>
-            <a:r>
-              <a:rPr sz="1350" b="1">
-                <a:solidFill>
-                  <a:srgbClr val="1A1A2E"/>
-                </a:solidFill>
-                <a:latin typeface="Segoe UI"/>
-              </a:rPr>
-              <a:t>Unmatched </a:t>
-            </a:r>
-            <a:r>
-              <a:rPr sz="1350" b="0">
-                <a:solidFill>
-                  <a:srgbClr val="1A1A2E"/>
-                </a:solidFill>
-                <a:latin typeface="Segoe UI"/>
-              </a:rPr>
-              <a:t>— everything else goes to the queue for you to associate by hand (no wrong guesses).</a:t>
-            </a:r>
-          </a:p>
-        </p:txBody>
-      </p:sp>
-      <p:sp>
-        <p:nvSpPr>
-          <p:cNvPr id="11" name="Rounded Rectangle 10"/>
+              <a:t>•  No API key? — chat degrades gracefully and points you to the form and JD parser, which work offline.</a:t>
+            </a:r>
+          </a:p>
+        </p:txBody>
+      </p:sp>
+      <p:sp>
+        <p:nvSpPr>
+          <p:cNvPr id="10" name="Rounded Rectangle 9"/>
           <p:cNvSpPr/>
           <p:nvPr/>
         </p:nvSpPr>
         <p:spPr>
           <a:xfrm>
-            <a:off x="6355080" y="1920240"/>
-            <a:ext cx="5303520" cy="2377440"/>
+            <a:off x="6355080" y="1463040"/>
+            <a:ext cx="5303520" cy="3931920"/>
           </a:xfrm>
           <a:prstGeom prst="roundRect">
             <a:avLst>
@@ -5903,10 +5711,12 @@
             </a:avLst>
           </a:prstGeom>
           <a:solidFill>
-            <a:srgbClr val="1A1A2E"/>
+            <a:srgbClr val="FFFFFF"/>
           </a:solidFill>
-          <a:ln>
-            <a:noFill/>
+          <a:ln w="12700">
+            <a:solidFill>
+              <a:srgbClr val="DDDDE6"/>
+            </a:solidFill>
           </a:ln>
           <a:effectLst/>
         </p:spPr>
@@ -5934,14 +5744,14 @@
       </p:sp>
       <p:sp>
         <p:nvSpPr>
-          <p:cNvPr id="12" name="TextBox 11"/>
+          <p:cNvPr id="11" name="TextBox 10"/>
           <p:cNvSpPr txBox="1"/>
           <p:nvPr/>
         </p:nvSpPr>
         <p:spPr>
           <a:xfrm>
-            <a:off x="6519672" y="2029968"/>
-            <a:ext cx="4974336" cy="2157984"/>
+            <a:off x="6583680" y="1600200"/>
+            <a:ext cx="4937760" cy="365760"/>
           </a:xfrm>
           <a:prstGeom prst="rect">
             <a:avLst/>
@@ -5962,189 +5772,31 @@
                 <a:spcPts val="0"/>
               </a:spcBef>
               <a:spcAft>
-                <a:spcPts val="200"/>
-              </a:spcAft>
-            </a:pPr>
-            <a:r>
-              <a:rPr sz="1000" b="1">
-                <a:solidFill>
-                  <a:srgbClr val="8A8AB0"/>
-                </a:solidFill>
-                <a:latin typeface="Segoe UI"/>
-              </a:rPr>
-              <a:t>commands</a:t>
-            </a:r>
-          </a:p>
-          <a:p>
-            <a:pPr algn="l">
-              <a:lnSpc>
-                <a:spcPct val="100000"/>
-              </a:lnSpc>
-              <a:spcBef>
-                <a:spcPts val="0"/>
-              </a:spcBef>
-              <a:spcAft>
-                <a:spcPts val="200"/>
-              </a:spcAft>
-            </a:pPr>
-            <a:r>
-              <a:rPr sz="1100" b="0">
-                <a:solidFill>
-                  <a:srgbClr val="D6D6E6"/>
-                </a:solidFill>
-                <a:latin typeface="Consolas"/>
-              </a:rPr>
-              <a:t>python scripts/auth_gmail.py   # once</a:t>
-            </a:r>
-          </a:p>
-          <a:p>
-            <a:pPr algn="l">
-              <a:lnSpc>
-                <a:spcPct val="100000"/>
-              </a:lnSpc>
-              <a:spcBef>
-                <a:spcPts val="0"/>
-              </a:spcBef>
-              <a:spcAft>
-                <a:spcPts val="200"/>
-              </a:spcAft>
-            </a:pPr>
-            <a:r>
-              <a:rPr sz="1100" b="0">
-                <a:solidFill>
-                  <a:srgbClr val="D6D6E6"/>
-                </a:solidFill>
-                <a:latin typeface="Consolas"/>
-              </a:rPr>
-              <a:t> </a:t>
-            </a:r>
-          </a:p>
-          <a:p>
-            <a:pPr algn="l">
-              <a:lnSpc>
-                <a:spcPct val="100000"/>
-              </a:lnSpc>
-              <a:spcBef>
-                <a:spcPts val="0"/>
-              </a:spcBef>
-              <a:spcAft>
-                <a:spcPts val="200"/>
-              </a:spcAft>
-            </a:pPr>
-            <a:r>
-              <a:rPr sz="1100" b="0">
-                <a:solidFill>
-                  <a:srgbClr val="D6D6E6"/>
-                </a:solidFill>
-                <a:latin typeface="Consolas"/>
-              </a:rPr>
-              <a:t>pacos monitor --days 1         # read</a:t>
-            </a:r>
-          </a:p>
-          <a:p>
-            <a:pPr algn="l">
-              <a:lnSpc>
-                <a:spcPct val="100000"/>
-              </a:lnSpc>
-              <a:spcBef>
-                <a:spcPts val="0"/>
-              </a:spcBef>
-              <a:spcAft>
-                <a:spcPts val="200"/>
-              </a:spcAft>
-            </a:pPr>
-            <a:r>
-              <a:rPr sz="1100" b="0">
-                <a:solidFill>
-                  <a:srgbClr val="D6D6E6"/>
-                </a:solidFill>
-                <a:latin typeface="Consolas"/>
-              </a:rPr>
-              <a:t>pacos associate                # list</a:t>
-            </a:r>
-          </a:p>
-          <a:p>
-            <a:pPr algn="l">
-              <a:lnSpc>
-                <a:spcPct val="100000"/>
-              </a:lnSpc>
-              <a:spcBef>
-                <a:spcPts val="0"/>
-              </a:spcBef>
-              <a:spcAft>
-                <a:spcPts val="200"/>
-              </a:spcAft>
-            </a:pPr>
-            <a:r>
-              <a:rPr sz="1100" b="0">
-                <a:solidFill>
-                  <a:srgbClr val="D6D6E6"/>
-                </a:solidFill>
-                <a:latin typeface="Consolas"/>
-              </a:rPr>
-              <a:t>pacos associate &lt;reply_id&gt; &lt;lead_id&gt;</a:t>
-            </a:r>
-          </a:p>
-        </p:txBody>
-      </p:sp>
-      <p:sp>
-        <p:nvSpPr>
-          <p:cNvPr id="13" name="Rounded Rectangle 12"/>
-          <p:cNvSpPr/>
-          <p:nvPr/>
-        </p:nvSpPr>
-        <p:spPr>
-          <a:xfrm>
-            <a:off x="6355080" y="4480560"/>
-            <a:ext cx="5303520" cy="960120"/>
-          </a:xfrm>
-          <a:prstGeom prst="roundRect">
-            <a:avLst>
-              <a:gd name="adj" fmla="val 8000"/>
-            </a:avLst>
-          </a:prstGeom>
-          <a:solidFill>
-            <a:srgbClr val="E4F7EC"/>
-          </a:solidFill>
-          <a:ln w="12700">
-            <a:solidFill>
-              <a:srgbClr val="B6E2CB"/>
-            </a:solidFill>
-          </a:ln>
-          <a:effectLst/>
-        </p:spPr>
-        <p:style>
-          <a:lnRef idx="1">
-            <a:schemeClr val="accent1"/>
-          </a:lnRef>
-          <a:fillRef idx="3">
-            <a:schemeClr val="accent1"/>
-          </a:fillRef>
-          <a:effectRef idx="2">
-            <a:schemeClr val="accent1"/>
-          </a:effectRef>
-          <a:fontRef idx="minor">
-            <a:schemeClr val="lt1"/>
-          </a:fontRef>
-        </p:style>
-        <p:txBody>
-          <a:bodyPr rtlCol="0" anchor="ctr"/>
-          <a:lstStyle/>
-          <a:p>
-            <a:pPr algn="ctr"/>
-          </a:p>
-        </p:txBody>
-      </p:sp>
-      <p:sp>
-        <p:nvSpPr>
-          <p:cNvPr id="14" name="TextBox 13"/>
+                <a:spcPts val="400"/>
+              </a:spcAft>
+            </a:pPr>
+            <a:r>
+              <a:rPr sz="1300" b="1">
+                <a:solidFill>
+                  <a:srgbClr val="1A1A2E"/>
+                </a:solidFill>
+                <a:latin typeface="Segoe UI"/>
+              </a:rPr>
+              <a:t>Try these</a:t>
+            </a:r>
+          </a:p>
+        </p:txBody>
+      </p:sp>
+      <p:sp>
+        <p:nvSpPr>
+          <p:cNvPr id="12" name="TextBox 11"/>
           <p:cNvSpPr txBox="1"/>
           <p:nvPr/>
         </p:nvSpPr>
         <p:spPr>
           <a:xfrm>
-            <a:off x="6583680" y="4480560"/>
-            <a:ext cx="4846320" cy="960120"/>
+            <a:off x="6583680" y="2057400"/>
+            <a:ext cx="4937760" cy="3108960"/>
           </a:xfrm>
           <a:prstGeom prst="rect">
             <a:avLst/>
@@ -6152,14 +5804,123 @@
           <a:noFill/>
         </p:spPr>
         <p:txBody>
-          <a:bodyPr wrap="square" anchor="ctr" lIns="0" rIns="0" tIns="0" bIns="0">
+          <a:bodyPr wrap="square" anchor="t" lIns="0" rIns="0" tIns="0" bIns="0">
             <a:spAutoFit/>
           </a:bodyPr>
           <a:lstStyle/>
           <a:p>
             <a:pPr algn="l">
               <a:lnSpc>
-                <a:spcPct val="110000"/>
+                <a:spcPct val="105000"/>
+              </a:lnSpc>
+              <a:spcBef>
+                <a:spcPts val="0"/>
+              </a:spcBef>
+              <a:spcAft>
+                <a:spcPts val="1200"/>
+              </a:spcAft>
+            </a:pPr>
+            <a:r>
+              <a:rPr sz="1250" b="1">
+                <a:solidFill>
+                  <a:srgbClr val="E84A2F"/>
+                </a:solidFill>
+                <a:latin typeface="Consolas"/>
+              </a:rPr>
+              <a:t>“How many leads do I have?”</a:t>
+            </a:r>
+          </a:p>
+          <a:p>
+            <a:pPr algn="l">
+              <a:lnSpc>
+                <a:spcPct val="105000"/>
+              </a:lnSpc>
+            </a:pPr>
+            <a:r>
+              <a:rPr sz="1250" b="1">
+                <a:solidFill>
+                  <a:srgbClr val="E84A2F"/>
+                </a:solidFill>
+                <a:latin typeface="Consolas"/>
+              </a:rPr>
+              <a:t>“Add this person: Priya Shah, engineering</a:t>
+            </a:r>
+          </a:p>
+          <a:p>
+            <a:pPr algn="l">
+              <a:lnSpc>
+                <a:spcPct val="105000"/>
+              </a:lnSpc>
+            </a:pPr>
+            <a:r>
+              <a:rPr sz="1250" b="1">
+                <a:solidFill>
+                  <a:srgbClr val="E84A2F"/>
+                </a:solidFill>
+                <a:latin typeface="Consolas"/>
+              </a:rPr>
+              <a:t>  manager at Razorpay, Bengaluru,</a:t>
+            </a:r>
+          </a:p>
+          <a:p>
+            <a:pPr algn="l">
+              <a:lnSpc>
+                <a:spcPct val="105000"/>
+              </a:lnSpc>
+            </a:pPr>
+            <a:r>
+              <a:rPr sz="1250" b="1">
+                <a:solidFill>
+                  <a:srgbClr val="E84A2F"/>
+                </a:solidFill>
+                <a:latin typeface="Consolas"/>
+              </a:rPr>
+              <a:t>  priya@razorpay.com”</a:t>
+            </a:r>
+          </a:p>
+          <a:p>
+            <a:pPr algn="l">
+              <a:lnSpc>
+                <a:spcPct val="105000"/>
+              </a:lnSpc>
+            </a:pPr>
+            <a:r>
+              <a:rPr sz="1250" b="1">
+                <a:solidFill>
+                  <a:srgbClr val="E84A2F"/>
+                </a:solidFill>
+                <a:latin typeface="Consolas"/>
+              </a:rPr>
+              <a:t>…or paste a whole JD into the chat</a:t>
+            </a:r>
+          </a:p>
+        </p:txBody>
+      </p:sp>
+      <p:sp>
+        <p:nvSpPr>
+          <p:cNvPr id="13" name="TextBox 12"/>
+          <p:cNvSpPr txBox="1"/>
+          <p:nvPr/>
+        </p:nvSpPr>
+        <p:spPr>
+          <a:xfrm>
+            <a:off x="6583680" y="4572000"/>
+            <a:ext cx="4937760" cy="731520"/>
+          </a:xfrm>
+          <a:prstGeom prst="rect">
+            <a:avLst/>
+          </a:prstGeom>
+          <a:noFill/>
+        </p:spPr>
+        <p:txBody>
+          <a:bodyPr wrap="square" anchor="t" lIns="0" rIns="0" tIns="0" bIns="0">
+            <a:spAutoFit/>
+          </a:bodyPr>
+          <a:lstStyle/>
+          <a:p>
+            <a:pPr algn="l">
+              <a:lnSpc>
+                <a:spcPct val="100000"/>
               </a:lnSpc>
               <a:spcBef>
                 <a:spcPts val="0"/>
@@ -6169,13 +5930,13 @@
               </a:spcAft>
             </a:pPr>
             <a:r>
-              <a:rPr sz="1250" b="1">
-                <a:solidFill>
-                  <a:srgbClr val="0F6B38"/>
-                </a:solidFill>
-                <a:latin typeface="Segoe UI"/>
-              </a:rPr>
-              <a:t>Read-only by design — scope is gmail.readonly. It cannot modify your mailbox.</a:t>
+              <a:rPr sz="1150" b="0">
+                <a:solidFill>
+                  <a:srgbClr val="6B6B7B"/>
+                </a:solidFill>
+                <a:latin typeface="Segoe UI"/>
+              </a:rPr>
+              <a:t>Flow:  proposal card → review the fields → [ Add to leads.csv ]</a:t>
             </a:r>
           </a:p>
         </p:txBody>
@@ -6370,7 +6131,7 @@
                 </a:solidFill>
                 <a:latin typeface="Segoe UI"/>
               </a:rPr>
-              <a:t>POWER USERS</a:t>
+              <a:t>LAYER 2</a:t>
             </a:r>
           </a:p>
         </p:txBody>
@@ -6415,7 +6176,7 @@
                 </a:solidFill>
                 <a:latin typeface="Segoe UI"/>
               </a:rPr>
-              <a:t>Command-Line Reference</a:t>
+              <a:t>The Inbox Monitor (optional)</a:t>
             </a:r>
           </a:p>
         </p:txBody>
@@ -6506,6 +6267,784 @@
                 <a:latin typeface="Segoe UI"/>
               </a:rPr>
               <a:t>12</a:t>
+            </a:r>
+          </a:p>
+        </p:txBody>
+      </p:sp>
+      <p:sp>
+        <p:nvSpPr>
+          <p:cNvPr id="9" name="TextBox 8"/>
+          <p:cNvSpPr txBox="1"/>
+          <p:nvPr/>
+        </p:nvSpPr>
+        <p:spPr>
+          <a:xfrm>
+            <a:off x="548640" y="1280160"/>
+            <a:ext cx="10972800" cy="457200"/>
+          </a:xfrm>
+          <a:prstGeom prst="rect">
+            <a:avLst/>
+          </a:prstGeom>
+          <a:noFill/>
+        </p:spPr>
+        <p:txBody>
+          <a:bodyPr wrap="square" anchor="t" lIns="0" rIns="0" tIns="0" bIns="0">
+            <a:spAutoFit/>
+          </a:bodyPr>
+          <a:lstStyle/>
+          <a:p>
+            <a:pPr algn="l">
+              <a:lnSpc>
+                <a:spcPct val="110000"/>
+              </a:lnSpc>
+              <a:spcBef>
+                <a:spcPts val="0"/>
+              </a:spcBef>
+              <a:spcAft>
+                <a:spcPts val="400"/>
+              </a:spcAft>
+            </a:pPr>
+            <a:r>
+              <a:rPr sz="1400" b="0">
+                <a:solidFill>
+                  <a:srgbClr val="6B6B7B"/>
+                </a:solidFill>
+                <a:latin typeface="Segoe UI"/>
+              </a:rPr>
+              <a:t>Read-only Gmail. It turns your inbox into structured signal — and never sends, deletes, or labels anything.</a:t>
+            </a:r>
+          </a:p>
+        </p:txBody>
+      </p:sp>
+      <p:sp>
+        <p:nvSpPr>
+          <p:cNvPr id="10" name="TextBox 9"/>
+          <p:cNvSpPr txBox="1"/>
+          <p:nvPr/>
+        </p:nvSpPr>
+        <p:spPr>
+          <a:xfrm>
+            <a:off x="548640" y="1920240"/>
+            <a:ext cx="5577840" cy="2743200"/>
+          </a:xfrm>
+          <a:prstGeom prst="rect">
+            <a:avLst/>
+          </a:prstGeom>
+          <a:noFill/>
+        </p:spPr>
+        <p:txBody>
+          <a:bodyPr wrap="square" anchor="t" lIns="0" rIns="0" tIns="0" bIns="0">
+            <a:spAutoFit/>
+          </a:bodyPr>
+          <a:lstStyle/>
+          <a:p>
+            <a:pPr algn="l">
+              <a:lnSpc>
+                <a:spcPct val="105000"/>
+              </a:lnSpc>
+              <a:spcBef>
+                <a:spcPts val="0"/>
+              </a:spcBef>
+              <a:spcAft>
+                <a:spcPts val="1100"/>
+              </a:spcAft>
+            </a:pPr>
+            <a:r>
+              <a:rPr sz="1350" b="1">
+                <a:solidFill>
+                  <a:srgbClr val="E84A2F"/>
+                </a:solidFill>
+                <a:latin typeface="Segoe UI"/>
+              </a:rPr>
+              <a:t>•  One-time setup — create OAuth credentials in Google Cloud, run the auth script once.</a:t>
+            </a:r>
+          </a:p>
+          <a:p>
+            <a:pPr algn="l">
+              <a:lnSpc>
+                <a:spcPct val="105000"/>
+              </a:lnSpc>
+            </a:pPr>
+            <a:r>
+              <a:rPr sz="1350" b="1">
+                <a:solidFill>
+                  <a:srgbClr val="E84A2F"/>
+                </a:solidFill>
+                <a:latin typeface="Segoe UI"/>
+              </a:rPr>
+              <a:t>•  Scan from the UI — the Tracker tab’s ‘Scan inbox’ button runs the same scan; no CLI needed.</a:t>
+            </a:r>
+          </a:p>
+          <a:p>
+            <a:pPr algn="l">
+              <a:lnSpc>
+                <a:spcPct val="105000"/>
+              </a:lnSpc>
+            </a:pPr>
+            <a:r>
+              <a:rPr sz="1350" b="1">
+                <a:solidFill>
+                  <a:srgbClr val="E84A2F"/>
+                </a:solidFill>
+                <a:latin typeface="Segoe UI"/>
+              </a:rPr>
+              <a:t>•  Job alerts — LinkedIn / Naukri alert emails append to new_jobs.csv.</a:t>
+            </a:r>
+          </a:p>
+          <a:p>
+            <a:pPr algn="l">
+              <a:lnSpc>
+                <a:spcPct val="105000"/>
+              </a:lnSpc>
+            </a:pPr>
+            <a:r>
+              <a:rPr sz="1350" b="1">
+                <a:solidFill>
+                  <a:srgbClr val="E84A2F"/>
+                </a:solidFill>
+                <a:latin typeface="Segoe UI"/>
+              </a:rPr>
+              <a:t>•  Replies (exact match) — a reply updates a lead only if the sender email equals the lead’s email.</a:t>
+            </a:r>
+          </a:p>
+          <a:p>
+            <a:pPr algn="l">
+              <a:lnSpc>
+                <a:spcPct val="105000"/>
+              </a:lnSpc>
+            </a:pPr>
+            <a:r>
+              <a:rPr sz="1350" b="1">
+                <a:solidFill>
+                  <a:srgbClr val="E84A2F"/>
+                </a:solidFill>
+                <a:latin typeface="Segoe UI"/>
+              </a:rPr>
+              <a:t>•  Unmatched — everything else queues for you to associate by hand (no wrong guesses).</a:t>
+            </a:r>
+          </a:p>
+        </p:txBody>
+      </p:sp>
+      <p:sp>
+        <p:nvSpPr>
+          <p:cNvPr id="11" name="Rounded Rectangle 10"/>
+          <p:cNvSpPr/>
+          <p:nvPr/>
+        </p:nvSpPr>
+        <p:spPr>
+          <a:xfrm>
+            <a:off x="6355080" y="1920240"/>
+            <a:ext cx="5303520" cy="2377440"/>
+          </a:xfrm>
+          <a:prstGeom prst="roundRect">
+            <a:avLst>
+              <a:gd name="adj" fmla="val 8000"/>
+            </a:avLst>
+          </a:prstGeom>
+          <a:solidFill>
+            <a:srgbClr val="1A1A2E"/>
+          </a:solidFill>
+          <a:ln>
+            <a:noFill/>
+          </a:ln>
+          <a:effectLst/>
+        </p:spPr>
+        <p:style>
+          <a:lnRef idx="1">
+            <a:schemeClr val="accent1"/>
+          </a:lnRef>
+          <a:fillRef idx="3">
+            <a:schemeClr val="accent1"/>
+          </a:fillRef>
+          <a:effectRef idx="2">
+            <a:schemeClr val="accent1"/>
+          </a:effectRef>
+          <a:fontRef idx="minor">
+            <a:schemeClr val="lt1"/>
+          </a:fontRef>
+        </p:style>
+        <p:txBody>
+          <a:bodyPr rtlCol="0" anchor="ctr"/>
+          <a:lstStyle/>
+          <a:p>
+            <a:pPr algn="ctr"/>
+          </a:p>
+        </p:txBody>
+      </p:sp>
+      <p:sp>
+        <p:nvSpPr>
+          <p:cNvPr id="12" name="TextBox 11"/>
+          <p:cNvSpPr txBox="1"/>
+          <p:nvPr/>
+        </p:nvSpPr>
+        <p:spPr>
+          <a:xfrm>
+            <a:off x="6519672" y="2029968"/>
+            <a:ext cx="4974336" cy="2157984"/>
+          </a:xfrm>
+          <a:prstGeom prst="rect">
+            <a:avLst/>
+          </a:prstGeom>
+          <a:noFill/>
+        </p:spPr>
+        <p:txBody>
+          <a:bodyPr wrap="square" anchor="t" lIns="0" rIns="0" tIns="0" bIns="0">
+            <a:spAutoFit/>
+          </a:bodyPr>
+          <a:lstStyle/>
+          <a:p>
+            <a:pPr algn="l">
+              <a:lnSpc>
+                <a:spcPct val="100000"/>
+              </a:lnSpc>
+              <a:spcBef>
+                <a:spcPts val="0"/>
+              </a:spcBef>
+              <a:spcAft>
+                <a:spcPts val="200"/>
+              </a:spcAft>
+            </a:pPr>
+            <a:r>
+              <a:rPr sz="1000" b="1">
+                <a:solidFill>
+                  <a:srgbClr val="8A8AB0"/>
+                </a:solidFill>
+                <a:latin typeface="Segoe UI"/>
+              </a:rPr>
+              <a:t>commands</a:t>
+            </a:r>
+          </a:p>
+          <a:p>
+            <a:pPr algn="l">
+              <a:lnSpc>
+                <a:spcPct val="100000"/>
+              </a:lnSpc>
+              <a:spcBef>
+                <a:spcPts val="0"/>
+              </a:spcBef>
+              <a:spcAft>
+                <a:spcPts val="200"/>
+              </a:spcAft>
+            </a:pPr>
+            <a:r>
+              <a:rPr sz="1100" b="0">
+                <a:solidFill>
+                  <a:srgbClr val="D6D6E6"/>
+                </a:solidFill>
+                <a:latin typeface="Consolas"/>
+              </a:rPr>
+              <a:t>python scripts/auth_gmail.py   # once</a:t>
+            </a:r>
+          </a:p>
+          <a:p>
+            <a:pPr algn="l">
+              <a:lnSpc>
+                <a:spcPct val="100000"/>
+              </a:lnSpc>
+              <a:spcBef>
+                <a:spcPts val="0"/>
+              </a:spcBef>
+              <a:spcAft>
+                <a:spcPts val="200"/>
+              </a:spcAft>
+            </a:pPr>
+            <a:r>
+              <a:rPr sz="1100" b="0">
+                <a:solidFill>
+                  <a:srgbClr val="D6D6E6"/>
+                </a:solidFill>
+                <a:latin typeface="Consolas"/>
+              </a:rPr>
+              <a:t> </a:t>
+            </a:r>
+          </a:p>
+          <a:p>
+            <a:pPr algn="l">
+              <a:lnSpc>
+                <a:spcPct val="100000"/>
+              </a:lnSpc>
+              <a:spcBef>
+                <a:spcPts val="0"/>
+              </a:spcBef>
+              <a:spcAft>
+                <a:spcPts val="200"/>
+              </a:spcAft>
+            </a:pPr>
+            <a:r>
+              <a:rPr sz="1100" b="0">
+                <a:solidFill>
+                  <a:srgbClr val="D6D6E6"/>
+                </a:solidFill>
+                <a:latin typeface="Consolas"/>
+              </a:rPr>
+              <a:t>pacos monitor --days 1         # read</a:t>
+            </a:r>
+          </a:p>
+          <a:p>
+            <a:pPr algn="l">
+              <a:lnSpc>
+                <a:spcPct val="100000"/>
+              </a:lnSpc>
+              <a:spcBef>
+                <a:spcPts val="0"/>
+              </a:spcBef>
+              <a:spcAft>
+                <a:spcPts val="200"/>
+              </a:spcAft>
+            </a:pPr>
+            <a:r>
+              <a:rPr sz="1100" b="0">
+                <a:solidFill>
+                  <a:srgbClr val="D6D6E6"/>
+                </a:solidFill>
+                <a:latin typeface="Consolas"/>
+              </a:rPr>
+              <a:t>pacos associate                # list</a:t>
+            </a:r>
+          </a:p>
+          <a:p>
+            <a:pPr algn="l">
+              <a:lnSpc>
+                <a:spcPct val="100000"/>
+              </a:lnSpc>
+              <a:spcBef>
+                <a:spcPts val="0"/>
+              </a:spcBef>
+              <a:spcAft>
+                <a:spcPts val="200"/>
+              </a:spcAft>
+            </a:pPr>
+            <a:r>
+              <a:rPr sz="1100" b="0">
+                <a:solidFill>
+                  <a:srgbClr val="D6D6E6"/>
+                </a:solidFill>
+                <a:latin typeface="Consolas"/>
+              </a:rPr>
+              <a:t>pacos associate &lt;reply_id&gt; &lt;lead_id&gt;</a:t>
+            </a:r>
+          </a:p>
+        </p:txBody>
+      </p:sp>
+      <p:sp>
+        <p:nvSpPr>
+          <p:cNvPr id="13" name="Rounded Rectangle 12"/>
+          <p:cNvSpPr/>
+          <p:nvPr/>
+        </p:nvSpPr>
+        <p:spPr>
+          <a:xfrm>
+            <a:off x="6355080" y="4480560"/>
+            <a:ext cx="5303520" cy="960120"/>
+          </a:xfrm>
+          <a:prstGeom prst="roundRect">
+            <a:avLst>
+              <a:gd name="adj" fmla="val 8000"/>
+            </a:avLst>
+          </a:prstGeom>
+          <a:solidFill>
+            <a:srgbClr val="E4F7EC"/>
+          </a:solidFill>
+          <a:ln w="12700">
+            <a:solidFill>
+              <a:srgbClr val="B6E2CB"/>
+            </a:solidFill>
+          </a:ln>
+          <a:effectLst/>
+        </p:spPr>
+        <p:style>
+          <a:lnRef idx="1">
+            <a:schemeClr val="accent1"/>
+          </a:lnRef>
+          <a:fillRef idx="3">
+            <a:schemeClr val="accent1"/>
+          </a:fillRef>
+          <a:effectRef idx="2">
+            <a:schemeClr val="accent1"/>
+          </a:effectRef>
+          <a:fontRef idx="minor">
+            <a:schemeClr val="lt1"/>
+          </a:fontRef>
+        </p:style>
+        <p:txBody>
+          <a:bodyPr rtlCol="0" anchor="ctr"/>
+          <a:lstStyle/>
+          <a:p>
+            <a:pPr algn="ctr"/>
+          </a:p>
+        </p:txBody>
+      </p:sp>
+      <p:sp>
+        <p:nvSpPr>
+          <p:cNvPr id="14" name="TextBox 13"/>
+          <p:cNvSpPr txBox="1"/>
+          <p:nvPr/>
+        </p:nvSpPr>
+        <p:spPr>
+          <a:xfrm>
+            <a:off x="6583680" y="4480560"/>
+            <a:ext cx="4846320" cy="960120"/>
+          </a:xfrm>
+          <a:prstGeom prst="rect">
+            <a:avLst/>
+          </a:prstGeom>
+          <a:noFill/>
+        </p:spPr>
+        <p:txBody>
+          <a:bodyPr wrap="square" anchor="ctr" lIns="0" rIns="0" tIns="0" bIns="0">
+            <a:spAutoFit/>
+          </a:bodyPr>
+          <a:lstStyle/>
+          <a:p>
+            <a:pPr algn="l">
+              <a:lnSpc>
+                <a:spcPct val="110000"/>
+              </a:lnSpc>
+              <a:spcBef>
+                <a:spcPts val="0"/>
+              </a:spcBef>
+              <a:spcAft>
+                <a:spcPts val="400"/>
+              </a:spcAft>
+            </a:pPr>
+            <a:r>
+              <a:rPr sz="1250" b="1">
+                <a:solidFill>
+                  <a:srgbClr val="0F6B38"/>
+                </a:solidFill>
+                <a:latin typeface="Segoe UI"/>
+              </a:rPr>
+              <a:t>Read-only by design — scope is gmail.readonly. It cannot modify your mailbox.</a:t>
+            </a:r>
+          </a:p>
+        </p:txBody>
+      </p:sp>
+    </p:spTree>
+  </p:cSld>
+  <p:clrMapOvr>
+    <a:masterClrMapping/>
+  </p:clrMapOvr>
+</p:sld>
+</file>
+
+<file path=ppt/slides/slide14.xml><?xml version="1.0" encoding="utf-8"?>
+<p:sld xmlns:a="http://schemas.openxmlformats.org/drawingml/2006/main" xmlns:p="http://schemas.openxmlformats.org/presentationml/2006/main" xmlns:r="http://schemas.openxmlformats.org/officeDocument/2006/relationships">
+  <p:cSld>
+    <p:spTree>
+      <p:nvGrpSpPr>
+        <p:cNvPr id="1" name=""/>
+        <p:cNvGrpSpPr/>
+        <p:nvPr/>
+      </p:nvGrpSpPr>
+      <p:grpSpPr/>
+      <p:sp>
+        <p:nvSpPr>
+          <p:cNvPr id="2" name="Rectangle 1"/>
+          <p:cNvSpPr/>
+          <p:nvPr/>
+        </p:nvSpPr>
+        <p:spPr>
+          <a:xfrm>
+            <a:off x="0" y="0"/>
+            <a:ext cx="12191695" cy="6858000"/>
+          </a:xfrm>
+          <a:prstGeom prst="rect">
+            <a:avLst/>
+          </a:prstGeom>
+          <a:solidFill>
+            <a:srgbClr val="FFFFFF"/>
+          </a:solidFill>
+          <a:ln>
+            <a:noFill/>
+          </a:ln>
+          <a:effectLst/>
+        </p:spPr>
+        <p:style>
+          <a:lnRef idx="1">
+            <a:schemeClr val="accent1"/>
+          </a:lnRef>
+          <a:fillRef idx="3">
+            <a:schemeClr val="accent1"/>
+          </a:fillRef>
+          <a:effectRef idx="2">
+            <a:schemeClr val="accent1"/>
+          </a:effectRef>
+          <a:fontRef idx="minor">
+            <a:schemeClr val="lt1"/>
+          </a:fontRef>
+        </p:style>
+        <p:txBody>
+          <a:bodyPr rtlCol="0" anchor="ctr"/>
+          <a:lstStyle/>
+          <a:p>
+            <a:pPr algn="ctr"/>
+          </a:p>
+        </p:txBody>
+      </p:sp>
+      <p:sp>
+        <p:nvSpPr>
+          <p:cNvPr id="3" name="Rectangle 2"/>
+          <p:cNvSpPr/>
+          <p:nvPr/>
+        </p:nvSpPr>
+        <p:spPr>
+          <a:xfrm>
+            <a:off x="0" y="0"/>
+            <a:ext cx="12191695" cy="1051560"/>
+          </a:xfrm>
+          <a:prstGeom prst="rect">
+            <a:avLst/>
+          </a:prstGeom>
+          <a:solidFill>
+            <a:srgbClr val="1A1A2E"/>
+          </a:solidFill>
+          <a:ln>
+            <a:noFill/>
+          </a:ln>
+          <a:effectLst/>
+        </p:spPr>
+        <p:style>
+          <a:lnRef idx="1">
+            <a:schemeClr val="accent1"/>
+          </a:lnRef>
+          <a:fillRef idx="3">
+            <a:schemeClr val="accent1"/>
+          </a:fillRef>
+          <a:effectRef idx="2">
+            <a:schemeClr val="accent1"/>
+          </a:effectRef>
+          <a:fontRef idx="minor">
+            <a:schemeClr val="lt1"/>
+          </a:fontRef>
+        </p:style>
+        <p:txBody>
+          <a:bodyPr rtlCol="0" anchor="ctr"/>
+          <a:lstStyle/>
+          <a:p>
+            <a:pPr algn="ctr"/>
+          </a:p>
+        </p:txBody>
+      </p:sp>
+      <p:sp>
+        <p:nvSpPr>
+          <p:cNvPr id="4" name="Rectangle 3"/>
+          <p:cNvSpPr/>
+          <p:nvPr/>
+        </p:nvSpPr>
+        <p:spPr>
+          <a:xfrm>
+            <a:off x="0" y="1051560"/>
+            <a:ext cx="12191695" cy="38100"/>
+          </a:xfrm>
+          <a:prstGeom prst="rect">
+            <a:avLst/>
+          </a:prstGeom>
+          <a:solidFill>
+            <a:srgbClr val="E84A2F"/>
+          </a:solidFill>
+          <a:ln>
+            <a:noFill/>
+          </a:ln>
+          <a:effectLst/>
+        </p:spPr>
+        <p:style>
+          <a:lnRef idx="1">
+            <a:schemeClr val="accent1"/>
+          </a:lnRef>
+          <a:fillRef idx="3">
+            <a:schemeClr val="accent1"/>
+          </a:fillRef>
+          <a:effectRef idx="2">
+            <a:schemeClr val="accent1"/>
+          </a:effectRef>
+          <a:fontRef idx="minor">
+            <a:schemeClr val="lt1"/>
+          </a:fontRef>
+        </p:style>
+        <p:txBody>
+          <a:bodyPr rtlCol="0" anchor="ctr"/>
+          <a:lstStyle/>
+          <a:p>
+            <a:pPr algn="ctr"/>
+          </a:p>
+        </p:txBody>
+      </p:sp>
+      <p:sp>
+        <p:nvSpPr>
+          <p:cNvPr id="5" name="TextBox 4"/>
+          <p:cNvSpPr txBox="1"/>
+          <p:nvPr/>
+        </p:nvSpPr>
+        <p:spPr>
+          <a:xfrm>
+            <a:off x="548640" y="182880"/>
+            <a:ext cx="10058400" cy="274320"/>
+          </a:xfrm>
+          <a:prstGeom prst="rect">
+            <a:avLst/>
+          </a:prstGeom>
+          <a:noFill/>
+        </p:spPr>
+        <p:txBody>
+          <a:bodyPr wrap="square" anchor="t" lIns="0" rIns="0" tIns="0" bIns="0">
+            <a:spAutoFit/>
+          </a:bodyPr>
+          <a:lstStyle/>
+          <a:p>
+            <a:pPr algn="l">
+              <a:lnSpc>
+                <a:spcPct val="100000"/>
+              </a:lnSpc>
+              <a:spcBef>
+                <a:spcPts val="0"/>
+              </a:spcBef>
+              <a:spcAft>
+                <a:spcPts val="400"/>
+              </a:spcAft>
+            </a:pPr>
+            <a:r>
+              <a:rPr sz="1100" b="1">
+                <a:solidFill>
+                  <a:srgbClr val="B9B9E0"/>
+                </a:solidFill>
+                <a:latin typeface="Segoe UI"/>
+              </a:rPr>
+              <a:t>POWER USERS</a:t>
+            </a:r>
+          </a:p>
+        </p:txBody>
+      </p:sp>
+      <p:sp>
+        <p:nvSpPr>
+          <p:cNvPr id="6" name="TextBox 5"/>
+          <p:cNvSpPr txBox="1"/>
+          <p:nvPr/>
+        </p:nvSpPr>
+        <p:spPr>
+          <a:xfrm>
+            <a:off x="548640" y="411480"/>
+            <a:ext cx="10972800" cy="548640"/>
+          </a:xfrm>
+          <a:prstGeom prst="rect">
+            <a:avLst/>
+          </a:prstGeom>
+          <a:noFill/>
+        </p:spPr>
+        <p:txBody>
+          <a:bodyPr wrap="square" anchor="t" lIns="0" rIns="0" tIns="0" bIns="0">
+            <a:spAutoFit/>
+          </a:bodyPr>
+          <a:lstStyle/>
+          <a:p>
+            <a:pPr algn="l">
+              <a:lnSpc>
+                <a:spcPct val="100000"/>
+              </a:lnSpc>
+              <a:spcBef>
+                <a:spcPts val="0"/>
+              </a:spcBef>
+              <a:spcAft>
+                <a:spcPts val="400"/>
+              </a:spcAft>
+            </a:pPr>
+            <a:r>
+              <a:rPr sz="2600" b="1">
+                <a:solidFill>
+                  <a:srgbClr val="FFFFFF"/>
+                </a:solidFill>
+                <a:latin typeface="Segoe UI"/>
+              </a:rPr>
+              <a:t>Command-Line Reference</a:t>
+            </a:r>
+          </a:p>
+        </p:txBody>
+      </p:sp>
+      <p:sp>
+        <p:nvSpPr>
+          <p:cNvPr id="7" name="TextBox 6"/>
+          <p:cNvSpPr txBox="1"/>
+          <p:nvPr/>
+        </p:nvSpPr>
+        <p:spPr>
+          <a:xfrm>
+            <a:off x="548640" y="6446520"/>
+            <a:ext cx="7315200" cy="274320"/>
+          </a:xfrm>
+          <a:prstGeom prst="rect">
+            <a:avLst/>
+          </a:prstGeom>
+          <a:noFill/>
+        </p:spPr>
+        <p:txBody>
+          <a:bodyPr wrap="square" anchor="t" lIns="0" rIns="0" tIns="0" bIns="0">
+            <a:spAutoFit/>
+          </a:bodyPr>
+          <a:lstStyle/>
+          <a:p>
+            <a:pPr algn="l">
+              <a:lnSpc>
+                <a:spcPct val="100000"/>
+              </a:lnSpc>
+              <a:spcBef>
+                <a:spcPts val="0"/>
+              </a:spcBef>
+              <a:spcAft>
+                <a:spcPts val="400"/>
+              </a:spcAft>
+            </a:pPr>
+            <a:r>
+              <a:rPr sz="900" b="0">
+                <a:solidFill>
+                  <a:srgbClr val="6B6B7B"/>
+                </a:solidFill>
+                <a:latin typeface="Segoe UI"/>
+              </a:rPr>
+              <a:t>PACOS · Personal AI Career Operating System</a:t>
+            </a:r>
+          </a:p>
+        </p:txBody>
+      </p:sp>
+      <p:sp>
+        <p:nvSpPr>
+          <p:cNvPr id="8" name="TextBox 7"/>
+          <p:cNvSpPr txBox="1"/>
+          <p:nvPr/>
+        </p:nvSpPr>
+        <p:spPr>
+          <a:xfrm>
+            <a:off x="10515600" y="6446520"/>
+            <a:ext cx="1097280" cy="274320"/>
+          </a:xfrm>
+          <a:prstGeom prst="rect">
+            <a:avLst/>
+          </a:prstGeom>
+          <a:noFill/>
+        </p:spPr>
+        <p:txBody>
+          <a:bodyPr wrap="square" anchor="t" lIns="0" rIns="0" tIns="0" bIns="0">
+            <a:spAutoFit/>
+          </a:bodyPr>
+          <a:lstStyle/>
+          <a:p>
+            <a:pPr algn="r">
+              <a:lnSpc>
+                <a:spcPct val="100000"/>
+              </a:lnSpc>
+              <a:spcBef>
+                <a:spcPts val="0"/>
+              </a:spcBef>
+              <a:spcAft>
+                <a:spcPts val="400"/>
+              </a:spcAft>
+            </a:pPr>
+            <a:r>
+              <a:rPr sz="900" b="1">
+                <a:solidFill>
+                  <a:srgbClr val="6B6B7B"/>
+                </a:solidFill>
+                <a:latin typeface="Segoe UI"/>
+              </a:rPr>
+              <a:t>13</a:t>
             </a:r>
           </a:p>
         </p:txBody>
@@ -7095,7 +7634,7 @@
 </p:sld>
 </file>
 
-<file path=ppt/slides/slide14.xml><?xml version="1.0" encoding="utf-8"?>
+<file path=ppt/slides/slide15.xml><?xml version="1.0" encoding="utf-8"?>
 <p:sld xmlns:a="http://schemas.openxmlformats.org/drawingml/2006/main" xmlns:p="http://schemas.openxmlformats.org/presentationml/2006/main" xmlns:r="http://schemas.openxmlformats.org/officeDocument/2006/relationships">
   <p:cSld>
     <p:spTree>
@@ -7412,7 +7951,7 @@
                 </a:solidFill>
                 <a:latin typeface="Segoe UI"/>
               </a:rPr>
-              <a:t>13</a:t>
+              <a:t>14</a:t>
             </a:r>
           </a:p>
         </p:txBody>
@@ -7881,994 +8420,6 @@
 </p:sld>
 </file>
 
-<file path=ppt/slides/slide15.xml><?xml version="1.0" encoding="utf-8"?>
-<p:sld xmlns:a="http://schemas.openxmlformats.org/drawingml/2006/main" xmlns:p="http://schemas.openxmlformats.org/presentationml/2006/main" xmlns:r="http://schemas.openxmlformats.org/officeDocument/2006/relationships">
-  <p:cSld>
-    <p:spTree>
-      <p:nvGrpSpPr>
-        <p:cNvPr id="1" name=""/>
-        <p:cNvGrpSpPr/>
-        <p:nvPr/>
-      </p:nvGrpSpPr>
-      <p:grpSpPr/>
-      <p:sp>
-        <p:nvSpPr>
-          <p:cNvPr id="2" name="Rectangle 1"/>
-          <p:cNvSpPr/>
-          <p:nvPr/>
-        </p:nvSpPr>
-        <p:spPr>
-          <a:xfrm>
-            <a:off x="0" y="0"/>
-            <a:ext cx="12191695" cy="6858000"/>
-          </a:xfrm>
-          <a:prstGeom prst="rect">
-            <a:avLst/>
-          </a:prstGeom>
-          <a:solidFill>
-            <a:srgbClr val="FFFFFF"/>
-          </a:solidFill>
-          <a:ln>
-            <a:noFill/>
-          </a:ln>
-          <a:effectLst/>
-        </p:spPr>
-        <p:style>
-          <a:lnRef idx="1">
-            <a:schemeClr val="accent1"/>
-          </a:lnRef>
-          <a:fillRef idx="3">
-            <a:schemeClr val="accent1"/>
-          </a:fillRef>
-          <a:effectRef idx="2">
-            <a:schemeClr val="accent1"/>
-          </a:effectRef>
-          <a:fontRef idx="minor">
-            <a:schemeClr val="lt1"/>
-          </a:fontRef>
-        </p:style>
-        <p:txBody>
-          <a:bodyPr rtlCol="0" anchor="ctr"/>
-          <a:lstStyle/>
-          <a:p>
-            <a:pPr algn="ctr"/>
-          </a:p>
-        </p:txBody>
-      </p:sp>
-      <p:sp>
-        <p:nvSpPr>
-          <p:cNvPr id="3" name="Rectangle 2"/>
-          <p:cNvSpPr/>
-          <p:nvPr/>
-        </p:nvSpPr>
-        <p:spPr>
-          <a:xfrm>
-            <a:off x="0" y="0"/>
-            <a:ext cx="12191695" cy="1051560"/>
-          </a:xfrm>
-          <a:prstGeom prst="rect">
-            <a:avLst/>
-          </a:prstGeom>
-          <a:solidFill>
-            <a:srgbClr val="1A1A2E"/>
-          </a:solidFill>
-          <a:ln>
-            <a:noFill/>
-          </a:ln>
-          <a:effectLst/>
-        </p:spPr>
-        <p:style>
-          <a:lnRef idx="1">
-            <a:schemeClr val="accent1"/>
-          </a:lnRef>
-          <a:fillRef idx="3">
-            <a:schemeClr val="accent1"/>
-          </a:fillRef>
-          <a:effectRef idx="2">
-            <a:schemeClr val="accent1"/>
-          </a:effectRef>
-          <a:fontRef idx="minor">
-            <a:schemeClr val="lt1"/>
-          </a:fontRef>
-        </p:style>
-        <p:txBody>
-          <a:bodyPr rtlCol="0" anchor="ctr"/>
-          <a:lstStyle/>
-          <a:p>
-            <a:pPr algn="ctr"/>
-          </a:p>
-        </p:txBody>
-      </p:sp>
-      <p:sp>
-        <p:nvSpPr>
-          <p:cNvPr id="4" name="Rectangle 3"/>
-          <p:cNvSpPr/>
-          <p:nvPr/>
-        </p:nvSpPr>
-        <p:spPr>
-          <a:xfrm>
-            <a:off x="0" y="1051560"/>
-            <a:ext cx="12191695" cy="38100"/>
-          </a:xfrm>
-          <a:prstGeom prst="rect">
-            <a:avLst/>
-          </a:prstGeom>
-          <a:solidFill>
-            <a:srgbClr val="E84A2F"/>
-          </a:solidFill>
-          <a:ln>
-            <a:noFill/>
-          </a:ln>
-          <a:effectLst/>
-        </p:spPr>
-        <p:style>
-          <a:lnRef idx="1">
-            <a:schemeClr val="accent1"/>
-          </a:lnRef>
-          <a:fillRef idx="3">
-            <a:schemeClr val="accent1"/>
-          </a:fillRef>
-          <a:effectRef idx="2">
-            <a:schemeClr val="accent1"/>
-          </a:effectRef>
-          <a:fontRef idx="minor">
-            <a:schemeClr val="lt1"/>
-          </a:fontRef>
-        </p:style>
-        <p:txBody>
-          <a:bodyPr rtlCol="0" anchor="ctr"/>
-          <a:lstStyle/>
-          <a:p>
-            <a:pPr algn="ctr"/>
-          </a:p>
-        </p:txBody>
-      </p:sp>
-      <p:sp>
-        <p:nvSpPr>
-          <p:cNvPr id="5" name="TextBox 4"/>
-          <p:cNvSpPr txBox="1"/>
-          <p:nvPr/>
-        </p:nvSpPr>
-        <p:spPr>
-          <a:xfrm>
-            <a:off x="548640" y="182880"/>
-            <a:ext cx="10058400" cy="274320"/>
-          </a:xfrm>
-          <a:prstGeom prst="rect">
-            <a:avLst/>
-          </a:prstGeom>
-          <a:noFill/>
-        </p:spPr>
-        <p:txBody>
-          <a:bodyPr wrap="square" anchor="t" lIns="0" rIns="0" tIns="0" bIns="0">
-            <a:spAutoFit/>
-          </a:bodyPr>
-          <a:lstStyle/>
-          <a:p>
-            <a:pPr algn="l">
-              <a:lnSpc>
-                <a:spcPct val="100000"/>
-              </a:lnSpc>
-              <a:spcBef>
-                <a:spcPts val="0"/>
-              </a:spcBef>
-              <a:spcAft>
-                <a:spcPts val="400"/>
-              </a:spcAft>
-            </a:pPr>
-            <a:r>
-              <a:rPr sz="1100" b="1">
-                <a:solidFill>
-                  <a:srgbClr val="B9B9E0"/>
-                </a:solidFill>
-                <a:latin typeface="Segoe UI"/>
-              </a:rPr>
-              <a:t>REMEMBER</a:t>
-            </a:r>
-          </a:p>
-        </p:txBody>
-      </p:sp>
-      <p:sp>
-        <p:nvSpPr>
-          <p:cNvPr id="6" name="TextBox 5"/>
-          <p:cNvSpPr txBox="1"/>
-          <p:nvPr/>
-        </p:nvSpPr>
-        <p:spPr>
-          <a:xfrm>
-            <a:off x="548640" y="411480"/>
-            <a:ext cx="10972800" cy="548640"/>
-          </a:xfrm>
-          <a:prstGeom prst="rect">
-            <a:avLst/>
-          </a:prstGeom>
-          <a:noFill/>
-        </p:spPr>
-        <p:txBody>
-          <a:bodyPr wrap="square" anchor="t" lIns="0" rIns="0" tIns="0" bIns="0">
-            <a:spAutoFit/>
-          </a:bodyPr>
-          <a:lstStyle/>
-          <a:p>
-            <a:pPr algn="l">
-              <a:lnSpc>
-                <a:spcPct val="100000"/>
-              </a:lnSpc>
-              <a:spcBef>
-                <a:spcPts val="0"/>
-              </a:spcBef>
-              <a:spcAft>
-                <a:spcPts val="400"/>
-              </a:spcAft>
-            </a:pPr>
-            <a:r>
-              <a:rPr sz="2600" b="1">
-                <a:solidFill>
-                  <a:srgbClr val="FFFFFF"/>
-                </a:solidFill>
-                <a:latin typeface="Segoe UI"/>
-              </a:rPr>
-              <a:t>Golden Rules &amp; Everyday Rhythm</a:t>
-            </a:r>
-          </a:p>
-        </p:txBody>
-      </p:sp>
-      <p:sp>
-        <p:nvSpPr>
-          <p:cNvPr id="7" name="TextBox 6"/>
-          <p:cNvSpPr txBox="1"/>
-          <p:nvPr/>
-        </p:nvSpPr>
-        <p:spPr>
-          <a:xfrm>
-            <a:off x="548640" y="6446520"/>
-            <a:ext cx="7315200" cy="274320"/>
-          </a:xfrm>
-          <a:prstGeom prst="rect">
-            <a:avLst/>
-          </a:prstGeom>
-          <a:noFill/>
-        </p:spPr>
-        <p:txBody>
-          <a:bodyPr wrap="square" anchor="t" lIns="0" rIns="0" tIns="0" bIns="0">
-            <a:spAutoFit/>
-          </a:bodyPr>
-          <a:lstStyle/>
-          <a:p>
-            <a:pPr algn="l">
-              <a:lnSpc>
-                <a:spcPct val="100000"/>
-              </a:lnSpc>
-              <a:spcBef>
-                <a:spcPts val="0"/>
-              </a:spcBef>
-              <a:spcAft>
-                <a:spcPts val="400"/>
-              </a:spcAft>
-            </a:pPr>
-            <a:r>
-              <a:rPr sz="900" b="0">
-                <a:solidFill>
-                  <a:srgbClr val="6B6B7B"/>
-                </a:solidFill>
-                <a:latin typeface="Segoe UI"/>
-              </a:rPr>
-              <a:t>PACOS · Personal AI Career Operating System</a:t>
-            </a:r>
-          </a:p>
-        </p:txBody>
-      </p:sp>
-      <p:sp>
-        <p:nvSpPr>
-          <p:cNvPr id="8" name="TextBox 7"/>
-          <p:cNvSpPr txBox="1"/>
-          <p:nvPr/>
-        </p:nvSpPr>
-        <p:spPr>
-          <a:xfrm>
-            <a:off x="10515600" y="6446520"/>
-            <a:ext cx="1097280" cy="274320"/>
-          </a:xfrm>
-          <a:prstGeom prst="rect">
-            <a:avLst/>
-          </a:prstGeom>
-          <a:noFill/>
-        </p:spPr>
-        <p:txBody>
-          <a:bodyPr wrap="square" anchor="t" lIns="0" rIns="0" tIns="0" bIns="0">
-            <a:spAutoFit/>
-          </a:bodyPr>
-          <a:lstStyle/>
-          <a:p>
-            <a:pPr algn="r">
-              <a:lnSpc>
-                <a:spcPct val="100000"/>
-              </a:lnSpc>
-              <a:spcBef>
-                <a:spcPts val="0"/>
-              </a:spcBef>
-              <a:spcAft>
-                <a:spcPts val="400"/>
-              </a:spcAft>
-            </a:pPr>
-            <a:r>
-              <a:rPr sz="900" b="1">
-                <a:solidFill>
-                  <a:srgbClr val="6B6B7B"/>
-                </a:solidFill>
-                <a:latin typeface="Segoe UI"/>
-              </a:rPr>
-              <a:t>14</a:t>
-            </a:r>
-          </a:p>
-        </p:txBody>
-      </p:sp>
-      <p:sp>
-        <p:nvSpPr>
-          <p:cNvPr id="9" name="Rounded Rectangle 8"/>
-          <p:cNvSpPr/>
-          <p:nvPr/>
-        </p:nvSpPr>
-        <p:spPr>
-          <a:xfrm>
-            <a:off x="548640" y="1417320"/>
-            <a:ext cx="5394960" cy="4480560"/>
-          </a:xfrm>
-          <a:prstGeom prst="roundRect">
-            <a:avLst>
-              <a:gd name="adj" fmla="val 8000"/>
-            </a:avLst>
-          </a:prstGeom>
-          <a:solidFill>
-            <a:srgbClr val="FFFFFF"/>
-          </a:solidFill>
-          <a:ln w="12700">
-            <a:solidFill>
-              <a:srgbClr val="DDDDE6"/>
-            </a:solidFill>
-          </a:ln>
-          <a:effectLst/>
-        </p:spPr>
-        <p:style>
-          <a:lnRef idx="1">
-            <a:schemeClr val="accent1"/>
-          </a:lnRef>
-          <a:fillRef idx="3">
-            <a:schemeClr val="accent1"/>
-          </a:fillRef>
-          <a:effectRef idx="2">
-            <a:schemeClr val="accent1"/>
-          </a:effectRef>
-          <a:fontRef idx="minor">
-            <a:schemeClr val="lt1"/>
-          </a:fontRef>
-        </p:style>
-        <p:txBody>
-          <a:bodyPr rtlCol="0" anchor="ctr"/>
-          <a:lstStyle/>
-          <a:p>
-            <a:pPr algn="ctr"/>
-          </a:p>
-        </p:txBody>
-      </p:sp>
-      <p:sp>
-        <p:nvSpPr>
-          <p:cNvPr id="10" name="TextBox 9"/>
-          <p:cNvSpPr txBox="1"/>
-          <p:nvPr/>
-        </p:nvSpPr>
-        <p:spPr>
-          <a:xfrm>
-            <a:off x="777240" y="1554480"/>
-            <a:ext cx="4937760" cy="365760"/>
-          </a:xfrm>
-          <a:prstGeom prst="rect">
-            <a:avLst/>
-          </a:prstGeom>
-          <a:noFill/>
-        </p:spPr>
-        <p:txBody>
-          <a:bodyPr wrap="square" anchor="t" lIns="0" rIns="0" tIns="0" bIns="0">
-            <a:spAutoFit/>
-          </a:bodyPr>
-          <a:lstStyle/>
-          <a:p>
-            <a:pPr algn="l">
-              <a:lnSpc>
-                <a:spcPct val="100000"/>
-              </a:lnSpc>
-              <a:spcBef>
-                <a:spcPts val="0"/>
-              </a:spcBef>
-              <a:spcAft>
-                <a:spcPts val="400"/>
-              </a:spcAft>
-            </a:pPr>
-            <a:r>
-              <a:rPr sz="1500" b="1">
-                <a:solidFill>
-                  <a:srgbClr val="E84A2F"/>
-                </a:solidFill>
-                <a:latin typeface="Segoe UI"/>
-              </a:rPr>
-              <a:t>Golden rules</a:t>
-            </a:r>
-          </a:p>
-        </p:txBody>
-      </p:sp>
-      <p:sp>
-        <p:nvSpPr>
-          <p:cNvPr id="11" name="TextBox 10"/>
-          <p:cNvSpPr txBox="1"/>
-          <p:nvPr/>
-        </p:nvSpPr>
-        <p:spPr>
-          <a:xfrm>
-            <a:off x="777240" y="2011680"/>
-            <a:ext cx="4937760" cy="3749039"/>
-          </a:xfrm>
-          <a:prstGeom prst="rect">
-            <a:avLst/>
-          </a:prstGeom>
-          <a:noFill/>
-        </p:spPr>
-        <p:txBody>
-          <a:bodyPr wrap="square" anchor="t" lIns="0" rIns="0" tIns="0" bIns="0">
-            <a:spAutoFit/>
-          </a:bodyPr>
-          <a:lstStyle/>
-          <a:p>
-            <a:pPr algn="l">
-              <a:lnSpc>
-                <a:spcPct val="105000"/>
-              </a:lnSpc>
-              <a:spcBef>
-                <a:spcPts val="0"/>
-              </a:spcBef>
-              <a:spcAft>
-                <a:spcPts val="1000"/>
-              </a:spcAft>
-            </a:pPr>
-            <a:r>
-              <a:rPr sz="1300" b="1">
-                <a:solidFill>
-                  <a:srgbClr val="E84A2F"/>
-                </a:solidFill>
-                <a:latin typeface="Segoe UI"/>
-              </a:rPr>
-              <a:t>•  </a:t>
-            </a:r>
-            <a:r>
-              <a:rPr sz="1300" b="0">
-                <a:solidFill>
-                  <a:srgbClr val="1A1A2E"/>
-                </a:solidFill>
-                <a:latin typeface="Segoe UI"/>
-              </a:rPr>
-              <a:t>PACOS never sends — you copy-paste every message.</a:t>
-            </a:r>
-          </a:p>
-          <a:p>
-            <a:pPr algn="l">
-              <a:lnSpc>
-                <a:spcPct val="105000"/>
-              </a:lnSpc>
-              <a:spcBef>
-                <a:spcPts val="0"/>
-              </a:spcBef>
-              <a:spcAft>
-                <a:spcPts val="1000"/>
-              </a:spcAft>
-            </a:pPr>
-            <a:r>
-              <a:rPr sz="1300" b="1">
-                <a:solidFill>
-                  <a:srgbClr val="E84A2F"/>
-                </a:solidFill>
-                <a:latin typeface="Segoe UI"/>
-              </a:rPr>
-              <a:t>•  </a:t>
-            </a:r>
-            <a:r>
-              <a:rPr sz="1300" b="0">
-                <a:solidFill>
-                  <a:srgbClr val="1A1A2E"/>
-                </a:solidFill>
-                <a:latin typeface="Segoe UI"/>
-              </a:rPr>
-              <a:t>Always read an asset before sending it.</a:t>
-            </a:r>
-          </a:p>
-          <a:p>
-            <a:pPr algn="l">
-              <a:lnSpc>
-                <a:spcPct val="105000"/>
-              </a:lnSpc>
-              <a:spcBef>
-                <a:spcPts val="0"/>
-              </a:spcBef>
-              <a:spcAft>
-                <a:spcPts val="1000"/>
-              </a:spcAft>
-            </a:pPr>
-            <a:r>
-              <a:rPr sz="1300" b="1">
-                <a:solidFill>
-                  <a:srgbClr val="E84A2F"/>
-                </a:solidFill>
-                <a:latin typeface="Segoe UI"/>
-              </a:rPr>
-              <a:t>•  </a:t>
-            </a:r>
-            <a:r>
-              <a:rPr sz="1300" b="0">
-                <a:solidFill>
-                  <a:srgbClr val="1A1A2E"/>
-                </a:solidFill>
-                <a:latin typeface="Segoe UI"/>
-              </a:rPr>
-              <a:t>The inbox monitor is read-only.</a:t>
-            </a:r>
-          </a:p>
-          <a:p>
-            <a:pPr algn="l">
-              <a:lnSpc>
-                <a:spcPct val="105000"/>
-              </a:lnSpc>
-              <a:spcBef>
-                <a:spcPts val="0"/>
-              </a:spcBef>
-              <a:spcAft>
-                <a:spcPts val="1000"/>
-              </a:spcAft>
-            </a:pPr>
-            <a:r>
-              <a:rPr sz="1300" b="1">
-                <a:solidFill>
-                  <a:srgbClr val="E84A2F"/>
-                </a:solidFill>
-                <a:latin typeface="Segoe UI"/>
-              </a:rPr>
-              <a:t>•  </a:t>
-            </a:r>
-            <a:r>
-              <a:rPr sz="1300" b="0">
-                <a:solidFill>
-                  <a:srgbClr val="1A1A2E"/>
-                </a:solidFill>
-                <a:latin typeface="Segoe UI"/>
-              </a:rPr>
-              <a:t>pacos.db is the source of truth; tracker.csv is an export.</a:t>
-            </a:r>
-          </a:p>
-          <a:p>
-            <a:pPr algn="l">
-              <a:lnSpc>
-                <a:spcPct val="105000"/>
-              </a:lnSpc>
-              <a:spcBef>
-                <a:spcPts val="0"/>
-              </a:spcBef>
-              <a:spcAft>
-                <a:spcPts val="1000"/>
-              </a:spcAft>
-            </a:pPr>
-            <a:r>
-              <a:rPr sz="1300" b="1">
-                <a:solidFill>
-                  <a:srgbClr val="E84A2F"/>
-                </a:solidFill>
-                <a:latin typeface="Segoe UI"/>
-              </a:rPr>
-              <a:t>•  </a:t>
-            </a:r>
-            <a:r>
-              <a:rPr sz="1300" b="0">
-                <a:solidFill>
-                  <a:srgbClr val="1A1A2E"/>
-                </a:solidFill>
-                <a:latin typeface="Segoe UI"/>
-              </a:rPr>
-              <a:t>Dry-run first when trying anything new — no tokens.</a:t>
-            </a:r>
-          </a:p>
-          <a:p>
-            <a:pPr algn="l">
-              <a:lnSpc>
-                <a:spcPct val="105000"/>
-              </a:lnSpc>
-              <a:spcBef>
-                <a:spcPts val="0"/>
-              </a:spcBef>
-              <a:spcAft>
-                <a:spcPts val="1000"/>
-              </a:spcAft>
-            </a:pPr>
-            <a:r>
-              <a:rPr sz="1300" b="1">
-                <a:solidFill>
-                  <a:srgbClr val="E84A2F"/>
-                </a:solidFill>
-                <a:latin typeface="Segoe UI"/>
-              </a:rPr>
-              <a:t>•  </a:t>
-            </a:r>
-            <a:r>
-              <a:rPr sz="1300" b="0">
-                <a:solidFill>
-                  <a:srgbClr val="1A1A2E"/>
-                </a:solidFill>
-                <a:latin typeface="Segoe UI"/>
-              </a:rPr>
-              <a:t>leads.csv is yours to edit; re-generate to refresh.</a:t>
-            </a:r>
-          </a:p>
-        </p:txBody>
-      </p:sp>
-      <p:sp>
-        <p:nvSpPr>
-          <p:cNvPr id="12" name="Rounded Rectangle 11"/>
-          <p:cNvSpPr/>
-          <p:nvPr/>
-        </p:nvSpPr>
-        <p:spPr>
-          <a:xfrm>
-            <a:off x="6263640" y="1417320"/>
-            <a:ext cx="5349240" cy="4480560"/>
-          </a:xfrm>
-          <a:prstGeom prst="roundRect">
-            <a:avLst>
-              <a:gd name="adj" fmla="val 8000"/>
-            </a:avLst>
-          </a:prstGeom>
-          <a:solidFill>
-            <a:srgbClr val="FFFFFF"/>
-          </a:solidFill>
-          <a:ln w="12700">
-            <a:solidFill>
-              <a:srgbClr val="DDDDE6"/>
-            </a:solidFill>
-          </a:ln>
-          <a:effectLst/>
-        </p:spPr>
-        <p:style>
-          <a:lnRef idx="1">
-            <a:schemeClr val="accent1"/>
-          </a:lnRef>
-          <a:fillRef idx="3">
-            <a:schemeClr val="accent1"/>
-          </a:fillRef>
-          <a:effectRef idx="2">
-            <a:schemeClr val="accent1"/>
-          </a:effectRef>
-          <a:fontRef idx="minor">
-            <a:schemeClr val="lt1"/>
-          </a:fontRef>
-        </p:style>
-        <p:txBody>
-          <a:bodyPr rtlCol="0" anchor="ctr"/>
-          <a:lstStyle/>
-          <a:p>
-            <a:pPr algn="ctr"/>
-          </a:p>
-        </p:txBody>
-      </p:sp>
-      <p:sp>
-        <p:nvSpPr>
-          <p:cNvPr id="13" name="TextBox 12"/>
-          <p:cNvSpPr txBox="1"/>
-          <p:nvPr/>
-        </p:nvSpPr>
-        <p:spPr>
-          <a:xfrm>
-            <a:off x="6492240" y="1554480"/>
-            <a:ext cx="4937760" cy="365760"/>
-          </a:xfrm>
-          <a:prstGeom prst="rect">
-            <a:avLst/>
-          </a:prstGeom>
-          <a:noFill/>
-        </p:spPr>
-        <p:txBody>
-          <a:bodyPr wrap="square" anchor="t" lIns="0" rIns="0" tIns="0" bIns="0">
-            <a:spAutoFit/>
-          </a:bodyPr>
-          <a:lstStyle/>
-          <a:p>
-            <a:pPr algn="l">
-              <a:lnSpc>
-                <a:spcPct val="100000"/>
-              </a:lnSpc>
-              <a:spcBef>
-                <a:spcPts val="0"/>
-              </a:spcBef>
-              <a:spcAft>
-                <a:spcPts val="400"/>
-              </a:spcAft>
-            </a:pPr>
-            <a:r>
-              <a:rPr sz="1500" b="1">
-                <a:solidFill>
-                  <a:srgbClr val="5B5BE6"/>
-                </a:solidFill>
-                <a:latin typeface="Segoe UI"/>
-              </a:rPr>
-              <a:t>A typical week</a:t>
-            </a:r>
-          </a:p>
-        </p:txBody>
-      </p:sp>
-      <p:sp>
-        <p:nvSpPr>
-          <p:cNvPr id="14" name="TextBox 13"/>
-          <p:cNvSpPr txBox="1"/>
-          <p:nvPr/>
-        </p:nvSpPr>
-        <p:spPr>
-          <a:xfrm>
-            <a:off x="6492240" y="2011680"/>
-            <a:ext cx="4892040" cy="3749039"/>
-          </a:xfrm>
-          <a:prstGeom prst="rect">
-            <a:avLst/>
-          </a:prstGeom>
-          <a:noFill/>
-        </p:spPr>
-        <p:txBody>
-          <a:bodyPr wrap="square" anchor="t" lIns="0" rIns="0" tIns="0" bIns="0">
-            <a:spAutoFit/>
-          </a:bodyPr>
-          <a:lstStyle/>
-          <a:p>
-            <a:pPr algn="l">
-              <a:lnSpc>
-                <a:spcPct val="105000"/>
-              </a:lnSpc>
-              <a:spcBef>
-                <a:spcPts val="0"/>
-              </a:spcBef>
-              <a:spcAft>
-                <a:spcPts val="900"/>
-              </a:spcAft>
-            </a:pPr>
-            <a:r>
-              <a:rPr sz="1250" b="1">
-                <a:solidFill>
-                  <a:srgbClr val="E84A2F"/>
-                </a:solidFill>
-                <a:latin typeface="Segoe UI"/>
-              </a:rPr>
-              <a:t>•  </a:t>
-            </a:r>
-            <a:r>
-              <a:rPr sz="1250" b="1">
-                <a:solidFill>
-                  <a:srgbClr val="1A1A2E"/>
-                </a:solidFill>
-                <a:latin typeface="Segoe UI"/>
-              </a:rPr>
-              <a:t>Add leads </a:t>
-            </a:r>
-            <a:r>
-              <a:rPr sz="1250" b="0">
-                <a:solidFill>
-                  <a:srgbClr val="1A1A2E"/>
-                </a:solidFill>
-                <a:latin typeface="Segoe UI"/>
-              </a:rPr>
-              <a:t>→ edit data/leads.csv.</a:t>
-            </a:r>
-          </a:p>
-          <a:p>
-            <a:pPr algn="l">
-              <a:lnSpc>
-                <a:spcPct val="105000"/>
-              </a:lnSpc>
-              <a:spcBef>
-                <a:spcPts val="0"/>
-              </a:spcBef>
-              <a:spcAft>
-                <a:spcPts val="900"/>
-              </a:spcAft>
-            </a:pPr>
-            <a:r>
-              <a:rPr sz="1250" b="1">
-                <a:solidFill>
-                  <a:srgbClr val="E84A2F"/>
-                </a:solidFill>
-                <a:latin typeface="Segoe UI"/>
-              </a:rPr>
-              <a:t>•  </a:t>
-            </a:r>
-            <a:r>
-              <a:rPr sz="1250" b="1">
-                <a:solidFill>
-                  <a:srgbClr val="1A1A2E"/>
-                </a:solidFill>
-                <a:latin typeface="Segoe UI"/>
-              </a:rPr>
-              <a:t>Generate </a:t>
-            </a:r>
-            <a:r>
-              <a:rPr sz="1250" b="0">
-                <a:solidFill>
-                  <a:srgbClr val="1A1A2E"/>
-                </a:solidFill>
-                <a:latin typeface="Segoe UI"/>
-              </a:rPr>
-              <a:t>→ Dashboard ‘Generate with Nemotron’.</a:t>
-            </a:r>
-          </a:p>
-          <a:p>
-            <a:pPr algn="l">
-              <a:lnSpc>
-                <a:spcPct val="105000"/>
-              </a:lnSpc>
-              <a:spcBef>
-                <a:spcPts val="0"/>
-              </a:spcBef>
-              <a:spcAft>
-                <a:spcPts val="900"/>
-              </a:spcAft>
-            </a:pPr>
-            <a:r>
-              <a:rPr sz="1250" b="1">
-                <a:solidFill>
-                  <a:srgbClr val="E84A2F"/>
-                </a:solidFill>
-                <a:latin typeface="Segoe UI"/>
-              </a:rPr>
-              <a:t>•  </a:t>
-            </a:r>
-            <a:r>
-              <a:rPr sz="1250" b="1">
-                <a:solidFill>
-                  <a:srgbClr val="1A1A2E"/>
-                </a:solidFill>
-                <a:latin typeface="Segoe UI"/>
-              </a:rPr>
-              <a:t>Review &amp; send </a:t>
-            </a:r>
-            <a:r>
-              <a:rPr sz="1250" b="0">
-                <a:solidFill>
-                  <a:srgbClr val="1A1A2E"/>
-                </a:solidFill>
-                <a:latin typeface="Segoe UI"/>
-              </a:rPr>
-              <a:t>→ Assets tab, copy, paste into Gmail/LinkedIn (Tue–Thu mornings).</a:t>
-            </a:r>
-          </a:p>
-          <a:p>
-            <a:pPr algn="l">
-              <a:lnSpc>
-                <a:spcPct val="105000"/>
-              </a:lnSpc>
-              <a:spcBef>
-                <a:spcPts val="0"/>
-              </a:spcBef>
-              <a:spcAft>
-                <a:spcPts val="900"/>
-              </a:spcAft>
-            </a:pPr>
-            <a:r>
-              <a:rPr sz="1250" b="1">
-                <a:solidFill>
-                  <a:srgbClr val="E84A2F"/>
-                </a:solidFill>
-                <a:latin typeface="Segoe UI"/>
-              </a:rPr>
-              <a:t>•  </a:t>
-            </a:r>
-            <a:r>
-              <a:rPr sz="1250" b="1">
-                <a:solidFill>
-                  <a:srgbClr val="1A1A2E"/>
-                </a:solidFill>
-                <a:latin typeface="Segoe UI"/>
-              </a:rPr>
-              <a:t>Log it </a:t>
-            </a:r>
-            <a:r>
-              <a:rPr sz="1250" b="0">
-                <a:solidFill>
-                  <a:srgbClr val="1A1A2E"/>
-                </a:solidFill>
-                <a:latin typeface="Segoe UI"/>
-              </a:rPr>
-              <a:t>→ Approvals: mark sent.</a:t>
-            </a:r>
-          </a:p>
-          <a:p>
-            <a:pPr algn="l">
-              <a:lnSpc>
-                <a:spcPct val="105000"/>
-              </a:lnSpc>
-              <a:spcBef>
-                <a:spcPts val="0"/>
-              </a:spcBef>
-              <a:spcAft>
-                <a:spcPts val="900"/>
-              </a:spcAft>
-            </a:pPr>
-            <a:r>
-              <a:rPr sz="1250" b="1">
-                <a:solidFill>
-                  <a:srgbClr val="E84A2F"/>
-                </a:solidFill>
-                <a:latin typeface="Segoe UI"/>
-              </a:rPr>
-              <a:t>•  </a:t>
-            </a:r>
-            <a:r>
-              <a:rPr sz="1250" b="1">
-                <a:solidFill>
-                  <a:srgbClr val="1A1A2E"/>
-                </a:solidFill>
-                <a:latin typeface="Segoe UI"/>
-              </a:rPr>
-              <a:t>Listen </a:t>
-            </a:r>
-            <a:r>
-              <a:rPr sz="1250" b="0">
-                <a:solidFill>
-                  <a:srgbClr val="1A1A2E"/>
-                </a:solidFill>
-                <a:latin typeface="Segoe UI"/>
-              </a:rPr>
-              <a:t>→ pacos monitor daily; associate unmatched.</a:t>
-            </a:r>
-          </a:p>
-          <a:p>
-            <a:pPr algn="l">
-              <a:lnSpc>
-                <a:spcPct val="105000"/>
-              </a:lnSpc>
-              <a:spcBef>
-                <a:spcPts val="0"/>
-              </a:spcBef>
-              <a:spcAft>
-                <a:spcPts val="900"/>
-              </a:spcAft>
-            </a:pPr>
-            <a:r>
-              <a:rPr sz="1250" b="1">
-                <a:solidFill>
-                  <a:srgbClr val="E84A2F"/>
-                </a:solidFill>
-                <a:latin typeface="Segoe UI"/>
-              </a:rPr>
-              <a:t>•  </a:t>
-            </a:r>
-            <a:r>
-              <a:rPr sz="1250" b="1">
-                <a:solidFill>
-                  <a:srgbClr val="1A1A2E"/>
-                </a:solidFill>
-                <a:latin typeface="Segoe UI"/>
-              </a:rPr>
-              <a:t>Act </a:t>
-            </a:r>
-            <a:r>
-              <a:rPr sz="1250" b="0">
-                <a:solidFill>
-                  <a:srgbClr val="1A1A2E"/>
-                </a:solidFill>
-                <a:latin typeface="Segoe UI"/>
-              </a:rPr>
-              <a:t>→ read the digest; follow up on what's due.</a:t>
-            </a:r>
-          </a:p>
-        </p:txBody>
-      </p:sp>
-    </p:spTree>
-  </p:cSld>
-  <p:clrMapOvr>
-    <a:masterClrMapping/>
-  </p:clrMapOvr>
-</p:sld>
-</file>
-
 <file path=ppt/slides/slide16.xml><?xml version="1.0" encoding="utf-8"?>
 <p:sld xmlns:a="http://schemas.openxmlformats.org/drawingml/2006/main" xmlns:p="http://schemas.openxmlformats.org/presentationml/2006/main" xmlns:r="http://schemas.openxmlformats.org/officeDocument/2006/relationships">
   <p:cSld>
@@ -8894,6 +8445,50 @@
             <a:avLst/>
           </a:prstGeom>
           <a:solidFill>
+            <a:srgbClr val="FFFFFF"/>
+          </a:solidFill>
+          <a:ln>
+            <a:noFill/>
+          </a:ln>
+          <a:effectLst/>
+        </p:spPr>
+        <p:style>
+          <a:lnRef idx="1">
+            <a:schemeClr val="accent1"/>
+          </a:lnRef>
+          <a:fillRef idx="3">
+            <a:schemeClr val="accent1"/>
+          </a:fillRef>
+          <a:effectRef idx="2">
+            <a:schemeClr val="accent1"/>
+          </a:effectRef>
+          <a:fontRef idx="minor">
+            <a:schemeClr val="lt1"/>
+          </a:fontRef>
+        </p:style>
+        <p:txBody>
+          <a:bodyPr rtlCol="0" anchor="ctr"/>
+          <a:lstStyle/>
+          <a:p>
+            <a:pPr algn="ctr"/>
+          </a:p>
+        </p:txBody>
+      </p:sp>
+      <p:sp>
+        <p:nvSpPr>
+          <p:cNvPr id="3" name="Rectangle 2"/>
+          <p:cNvSpPr/>
+          <p:nvPr/>
+        </p:nvSpPr>
+        <p:spPr>
+          <a:xfrm>
+            <a:off x="0" y="0"/>
+            <a:ext cx="12191695" cy="1051560"/>
+          </a:xfrm>
+          <a:prstGeom prst="rect">
+            <a:avLst/>
+          </a:prstGeom>
+          <a:solidFill>
             <a:srgbClr val="1A1A2E"/>
           </a:solidFill>
           <a:ln>
@@ -8925,14 +8520,14 @@
       </p:sp>
       <p:sp>
         <p:nvSpPr>
-          <p:cNvPr id="3" name="Rectangle 2"/>
+          <p:cNvPr id="4" name="Rectangle 3"/>
           <p:cNvSpPr/>
           <p:nvPr/>
         </p:nvSpPr>
         <p:spPr>
           <a:xfrm>
-            <a:off x="0" y="0"/>
-            <a:ext cx="320040" cy="6858000"/>
+            <a:off x="0" y="1051560"/>
+            <a:ext cx="12191695" cy="38100"/>
           </a:xfrm>
           <a:prstGeom prst="rect">
             <a:avLst/>
@@ -8969,14 +8564,14 @@
       </p:sp>
       <p:sp>
         <p:nvSpPr>
-          <p:cNvPr id="4" name="TextBox 3"/>
+          <p:cNvPr id="5" name="TextBox 4"/>
           <p:cNvSpPr txBox="1"/>
           <p:nvPr/>
         </p:nvSpPr>
         <p:spPr>
           <a:xfrm>
-            <a:off x="822960" y="2194560"/>
-            <a:ext cx="10515600" cy="914400"/>
+            <a:off x="548640" y="182880"/>
+            <a:ext cx="10058400" cy="274320"/>
           </a:xfrm>
           <a:prstGeom prst="rect">
             <a:avLst/>
@@ -9001,27 +8596,27 @@
               </a:spcAft>
             </a:pPr>
             <a:r>
-              <a:rPr sz="3400" b="1">
-                <a:solidFill>
-                  <a:srgbClr val="FFFFFF"/>
-                </a:solidFill>
-                <a:latin typeface="Segoe UI"/>
-              </a:rPr>
-              <a:t>You're ready to run PACOS.</a:t>
-            </a:r>
-          </a:p>
-        </p:txBody>
-      </p:sp>
-      <p:sp>
-        <p:nvSpPr>
-          <p:cNvPr id="5" name="TextBox 4"/>
+              <a:rPr sz="1100" b="1">
+                <a:solidFill>
+                  <a:srgbClr val="B9B9E0"/>
+                </a:solidFill>
+                <a:latin typeface="Segoe UI"/>
+              </a:rPr>
+              <a:t>REMEMBER</a:t>
+            </a:r>
+          </a:p>
+        </p:txBody>
+      </p:sp>
+      <p:sp>
+        <p:nvSpPr>
+          <p:cNvPr id="6" name="TextBox 5"/>
           <p:cNvSpPr txBox="1"/>
           <p:nvPr/>
         </p:nvSpPr>
         <p:spPr>
           <a:xfrm>
-            <a:off x="868680" y="3200400"/>
-            <a:ext cx="10332720" cy="1463040"/>
+            <a:off x="548640" y="411480"/>
+            <a:ext cx="10972800" cy="548640"/>
           </a:xfrm>
           <a:prstGeom prst="rect">
             <a:avLst/>
@@ -9036,6 +8631,728 @@
           <a:p>
             <a:pPr algn="l">
               <a:lnSpc>
+                <a:spcPct val="100000"/>
+              </a:lnSpc>
+              <a:spcBef>
+                <a:spcPts val="0"/>
+              </a:spcBef>
+              <a:spcAft>
+                <a:spcPts val="400"/>
+              </a:spcAft>
+            </a:pPr>
+            <a:r>
+              <a:rPr sz="2600" b="1">
+                <a:solidFill>
+                  <a:srgbClr val="FFFFFF"/>
+                </a:solidFill>
+                <a:latin typeface="Segoe UI"/>
+              </a:rPr>
+              <a:t>Golden Rules &amp; Everyday Rhythm</a:t>
+            </a:r>
+          </a:p>
+        </p:txBody>
+      </p:sp>
+      <p:sp>
+        <p:nvSpPr>
+          <p:cNvPr id="7" name="TextBox 6"/>
+          <p:cNvSpPr txBox="1"/>
+          <p:nvPr/>
+        </p:nvSpPr>
+        <p:spPr>
+          <a:xfrm>
+            <a:off x="548640" y="6446520"/>
+            <a:ext cx="7315200" cy="274320"/>
+          </a:xfrm>
+          <a:prstGeom prst="rect">
+            <a:avLst/>
+          </a:prstGeom>
+          <a:noFill/>
+        </p:spPr>
+        <p:txBody>
+          <a:bodyPr wrap="square" anchor="t" lIns="0" rIns="0" tIns="0" bIns="0">
+            <a:spAutoFit/>
+          </a:bodyPr>
+          <a:lstStyle/>
+          <a:p>
+            <a:pPr algn="l">
+              <a:lnSpc>
+                <a:spcPct val="100000"/>
+              </a:lnSpc>
+              <a:spcBef>
+                <a:spcPts val="0"/>
+              </a:spcBef>
+              <a:spcAft>
+                <a:spcPts val="400"/>
+              </a:spcAft>
+            </a:pPr>
+            <a:r>
+              <a:rPr sz="900" b="0">
+                <a:solidFill>
+                  <a:srgbClr val="6B6B7B"/>
+                </a:solidFill>
+                <a:latin typeface="Segoe UI"/>
+              </a:rPr>
+              <a:t>PACOS · Personal AI Career Operating System</a:t>
+            </a:r>
+          </a:p>
+        </p:txBody>
+      </p:sp>
+      <p:sp>
+        <p:nvSpPr>
+          <p:cNvPr id="8" name="TextBox 7"/>
+          <p:cNvSpPr txBox="1"/>
+          <p:nvPr/>
+        </p:nvSpPr>
+        <p:spPr>
+          <a:xfrm>
+            <a:off x="10515600" y="6446520"/>
+            <a:ext cx="1097280" cy="274320"/>
+          </a:xfrm>
+          <a:prstGeom prst="rect">
+            <a:avLst/>
+          </a:prstGeom>
+          <a:noFill/>
+        </p:spPr>
+        <p:txBody>
+          <a:bodyPr wrap="square" anchor="t" lIns="0" rIns="0" tIns="0" bIns="0">
+            <a:spAutoFit/>
+          </a:bodyPr>
+          <a:lstStyle/>
+          <a:p>
+            <a:pPr algn="r">
+              <a:lnSpc>
+                <a:spcPct val="100000"/>
+              </a:lnSpc>
+              <a:spcBef>
+                <a:spcPts val="0"/>
+              </a:spcBef>
+              <a:spcAft>
+                <a:spcPts val="400"/>
+              </a:spcAft>
+            </a:pPr>
+            <a:r>
+              <a:rPr sz="900" b="1">
+                <a:solidFill>
+                  <a:srgbClr val="6B6B7B"/>
+                </a:solidFill>
+                <a:latin typeface="Segoe UI"/>
+              </a:rPr>
+              <a:t>15</a:t>
+            </a:r>
+          </a:p>
+        </p:txBody>
+      </p:sp>
+      <p:sp>
+        <p:nvSpPr>
+          <p:cNvPr id="9" name="Rounded Rectangle 8"/>
+          <p:cNvSpPr/>
+          <p:nvPr/>
+        </p:nvSpPr>
+        <p:spPr>
+          <a:xfrm>
+            <a:off x="548640" y="1417320"/>
+            <a:ext cx="5394960" cy="4480560"/>
+          </a:xfrm>
+          <a:prstGeom prst="roundRect">
+            <a:avLst>
+              <a:gd name="adj" fmla="val 8000"/>
+            </a:avLst>
+          </a:prstGeom>
+          <a:solidFill>
+            <a:srgbClr val="FFFFFF"/>
+          </a:solidFill>
+          <a:ln w="12700">
+            <a:solidFill>
+              <a:srgbClr val="DDDDE6"/>
+            </a:solidFill>
+          </a:ln>
+          <a:effectLst/>
+        </p:spPr>
+        <p:style>
+          <a:lnRef idx="1">
+            <a:schemeClr val="accent1"/>
+          </a:lnRef>
+          <a:fillRef idx="3">
+            <a:schemeClr val="accent1"/>
+          </a:fillRef>
+          <a:effectRef idx="2">
+            <a:schemeClr val="accent1"/>
+          </a:effectRef>
+          <a:fontRef idx="minor">
+            <a:schemeClr val="lt1"/>
+          </a:fontRef>
+        </p:style>
+        <p:txBody>
+          <a:bodyPr rtlCol="0" anchor="ctr"/>
+          <a:lstStyle/>
+          <a:p>
+            <a:pPr algn="ctr"/>
+          </a:p>
+        </p:txBody>
+      </p:sp>
+      <p:sp>
+        <p:nvSpPr>
+          <p:cNvPr id="10" name="TextBox 9"/>
+          <p:cNvSpPr txBox="1"/>
+          <p:nvPr/>
+        </p:nvSpPr>
+        <p:spPr>
+          <a:xfrm>
+            <a:off x="777240" y="1554480"/>
+            <a:ext cx="4937760" cy="365760"/>
+          </a:xfrm>
+          <a:prstGeom prst="rect">
+            <a:avLst/>
+          </a:prstGeom>
+          <a:noFill/>
+        </p:spPr>
+        <p:txBody>
+          <a:bodyPr wrap="square" anchor="t" lIns="0" rIns="0" tIns="0" bIns="0">
+            <a:spAutoFit/>
+          </a:bodyPr>
+          <a:lstStyle/>
+          <a:p>
+            <a:pPr algn="l">
+              <a:lnSpc>
+                <a:spcPct val="100000"/>
+              </a:lnSpc>
+              <a:spcBef>
+                <a:spcPts val="0"/>
+              </a:spcBef>
+              <a:spcAft>
+                <a:spcPts val="400"/>
+              </a:spcAft>
+            </a:pPr>
+            <a:r>
+              <a:rPr sz="1500" b="1">
+                <a:solidFill>
+                  <a:srgbClr val="E84A2F"/>
+                </a:solidFill>
+                <a:latin typeface="Segoe UI"/>
+              </a:rPr>
+              <a:t>Golden rules</a:t>
+            </a:r>
+          </a:p>
+        </p:txBody>
+      </p:sp>
+      <p:sp>
+        <p:nvSpPr>
+          <p:cNvPr id="11" name="TextBox 10"/>
+          <p:cNvSpPr txBox="1"/>
+          <p:nvPr/>
+        </p:nvSpPr>
+        <p:spPr>
+          <a:xfrm>
+            <a:off x="777240" y="2011680"/>
+            <a:ext cx="4937760" cy="3749039"/>
+          </a:xfrm>
+          <a:prstGeom prst="rect">
+            <a:avLst/>
+          </a:prstGeom>
+          <a:noFill/>
+        </p:spPr>
+        <p:txBody>
+          <a:bodyPr wrap="square" anchor="t" lIns="0" rIns="0" tIns="0" bIns="0">
+            <a:spAutoFit/>
+          </a:bodyPr>
+          <a:lstStyle/>
+          <a:p>
+            <a:pPr algn="l">
+              <a:lnSpc>
+                <a:spcPct val="105000"/>
+              </a:lnSpc>
+              <a:spcBef>
+                <a:spcPts val="0"/>
+              </a:spcBef>
+              <a:spcAft>
+                <a:spcPts val="1000"/>
+              </a:spcAft>
+            </a:pPr>
+            <a:r>
+              <a:rPr sz="1300" b="1">
+                <a:solidFill>
+                  <a:srgbClr val="E84A2F"/>
+                </a:solidFill>
+                <a:latin typeface="Segoe UI"/>
+              </a:rPr>
+              <a:t>•  PACOS never sends — you copy-paste every message.</a:t>
+            </a:r>
+          </a:p>
+          <a:p>
+            <a:pPr algn="l">
+              <a:lnSpc>
+                <a:spcPct val="105000"/>
+              </a:lnSpc>
+            </a:pPr>
+            <a:r>
+              <a:rPr sz="1300" b="1">
+                <a:solidFill>
+                  <a:srgbClr val="E84A2F"/>
+                </a:solidFill>
+                <a:latin typeface="Segoe UI"/>
+              </a:rPr>
+              <a:t>•  Extractors only propose — JD parser &amp; chat leads are saved only when you confirm.</a:t>
+            </a:r>
+          </a:p>
+          <a:p>
+            <a:pPr algn="l">
+              <a:lnSpc>
+                <a:spcPct val="105000"/>
+              </a:lnSpc>
+            </a:pPr>
+            <a:r>
+              <a:rPr sz="1300" b="1">
+                <a:solidFill>
+                  <a:srgbClr val="E84A2F"/>
+                </a:solidFill>
+                <a:latin typeface="Segoe UI"/>
+              </a:rPr>
+              <a:t>•  Always read an asset before sending it.</a:t>
+            </a:r>
+          </a:p>
+          <a:p>
+            <a:pPr algn="l">
+              <a:lnSpc>
+                <a:spcPct val="105000"/>
+              </a:lnSpc>
+            </a:pPr>
+            <a:r>
+              <a:rPr sz="1300" b="1">
+                <a:solidFill>
+                  <a:srgbClr val="E84A2F"/>
+                </a:solidFill>
+                <a:latin typeface="Segoe UI"/>
+              </a:rPr>
+              <a:t>•  The inbox monitor is read-only.</a:t>
+            </a:r>
+          </a:p>
+          <a:p>
+            <a:pPr algn="l">
+              <a:lnSpc>
+                <a:spcPct val="105000"/>
+              </a:lnSpc>
+            </a:pPr>
+            <a:r>
+              <a:rPr sz="1300" b="1">
+                <a:solidFill>
+                  <a:srgbClr val="E84A2F"/>
+                </a:solidFill>
+                <a:latin typeface="Segoe UI"/>
+              </a:rPr>
+              <a:t>•  tracker.db is the source of truth; tracker.csv is an export.</a:t>
+            </a:r>
+          </a:p>
+          <a:p>
+            <a:pPr algn="l">
+              <a:lnSpc>
+                <a:spcPct val="105000"/>
+              </a:lnSpc>
+            </a:pPr>
+            <a:r>
+              <a:rPr sz="1300" b="1">
+                <a:solidFill>
+                  <a:srgbClr val="E84A2F"/>
+                </a:solidFill>
+                <a:latin typeface="Segoe UI"/>
+              </a:rPr>
+              <a:t>•  Dry-run first when trying anything new — no tokens.</a:t>
+            </a:r>
+          </a:p>
+        </p:txBody>
+      </p:sp>
+      <p:sp>
+        <p:nvSpPr>
+          <p:cNvPr id="12" name="Rounded Rectangle 11"/>
+          <p:cNvSpPr/>
+          <p:nvPr/>
+        </p:nvSpPr>
+        <p:spPr>
+          <a:xfrm>
+            <a:off x="6263640" y="1417320"/>
+            <a:ext cx="5349240" cy="4480560"/>
+          </a:xfrm>
+          <a:prstGeom prst="roundRect">
+            <a:avLst>
+              <a:gd name="adj" fmla="val 8000"/>
+            </a:avLst>
+          </a:prstGeom>
+          <a:solidFill>
+            <a:srgbClr val="FFFFFF"/>
+          </a:solidFill>
+          <a:ln w="12700">
+            <a:solidFill>
+              <a:srgbClr val="DDDDE6"/>
+            </a:solidFill>
+          </a:ln>
+          <a:effectLst/>
+        </p:spPr>
+        <p:style>
+          <a:lnRef idx="1">
+            <a:schemeClr val="accent1"/>
+          </a:lnRef>
+          <a:fillRef idx="3">
+            <a:schemeClr val="accent1"/>
+          </a:fillRef>
+          <a:effectRef idx="2">
+            <a:schemeClr val="accent1"/>
+          </a:effectRef>
+          <a:fontRef idx="minor">
+            <a:schemeClr val="lt1"/>
+          </a:fontRef>
+        </p:style>
+        <p:txBody>
+          <a:bodyPr rtlCol="0" anchor="ctr"/>
+          <a:lstStyle/>
+          <a:p>
+            <a:pPr algn="ctr"/>
+          </a:p>
+        </p:txBody>
+      </p:sp>
+      <p:sp>
+        <p:nvSpPr>
+          <p:cNvPr id="13" name="TextBox 12"/>
+          <p:cNvSpPr txBox="1"/>
+          <p:nvPr/>
+        </p:nvSpPr>
+        <p:spPr>
+          <a:xfrm>
+            <a:off x="6492240" y="1554480"/>
+            <a:ext cx="4937760" cy="365760"/>
+          </a:xfrm>
+          <a:prstGeom prst="rect">
+            <a:avLst/>
+          </a:prstGeom>
+          <a:noFill/>
+        </p:spPr>
+        <p:txBody>
+          <a:bodyPr wrap="square" anchor="t" lIns="0" rIns="0" tIns="0" bIns="0">
+            <a:spAutoFit/>
+          </a:bodyPr>
+          <a:lstStyle/>
+          <a:p>
+            <a:pPr algn="l">
+              <a:lnSpc>
+                <a:spcPct val="100000"/>
+              </a:lnSpc>
+              <a:spcBef>
+                <a:spcPts val="0"/>
+              </a:spcBef>
+              <a:spcAft>
+                <a:spcPts val="400"/>
+              </a:spcAft>
+            </a:pPr>
+            <a:r>
+              <a:rPr sz="1500" b="1">
+                <a:solidFill>
+                  <a:srgbClr val="5B5BE6"/>
+                </a:solidFill>
+                <a:latin typeface="Segoe UI"/>
+              </a:rPr>
+              <a:t>A typical week</a:t>
+            </a:r>
+          </a:p>
+        </p:txBody>
+      </p:sp>
+      <p:sp>
+        <p:nvSpPr>
+          <p:cNvPr id="14" name="TextBox 13"/>
+          <p:cNvSpPr txBox="1"/>
+          <p:nvPr/>
+        </p:nvSpPr>
+        <p:spPr>
+          <a:xfrm>
+            <a:off x="6492240" y="2011680"/>
+            <a:ext cx="4892040" cy="3749039"/>
+          </a:xfrm>
+          <a:prstGeom prst="rect">
+            <a:avLst/>
+          </a:prstGeom>
+          <a:noFill/>
+        </p:spPr>
+        <p:txBody>
+          <a:bodyPr wrap="square" anchor="t" lIns="0" rIns="0" tIns="0" bIns="0">
+            <a:spAutoFit/>
+          </a:bodyPr>
+          <a:lstStyle/>
+          <a:p>
+            <a:pPr algn="l">
+              <a:lnSpc>
+                <a:spcPct val="105000"/>
+              </a:lnSpc>
+              <a:spcBef>
+                <a:spcPts val="0"/>
+              </a:spcBef>
+              <a:spcAft>
+                <a:spcPts val="900"/>
+              </a:spcAft>
+            </a:pPr>
+            <a:r>
+              <a:rPr sz="1250" b="1">
+                <a:solidFill>
+                  <a:srgbClr val="E84A2F"/>
+                </a:solidFill>
+                <a:latin typeface="Segoe UI"/>
+              </a:rPr>
+              <a:t>•  Add leads — paste a JD or chat (‘Add this person…’); confirm the proposal. Or use the form.</a:t>
+            </a:r>
+          </a:p>
+          <a:p>
+            <a:pPr algn="l">
+              <a:lnSpc>
+                <a:spcPct val="105000"/>
+              </a:lnSpc>
+            </a:pPr>
+            <a:r>
+              <a:rPr sz="1250" b="1">
+                <a:solidFill>
+                  <a:srgbClr val="E84A2F"/>
+                </a:solidFill>
+                <a:latin typeface="Segoe UI"/>
+              </a:rPr>
+              <a:t>•  Generate — Dashboard ‘Generate with Nemotron’.</a:t>
+            </a:r>
+          </a:p>
+          <a:p>
+            <a:pPr algn="l">
+              <a:lnSpc>
+                <a:spcPct val="105000"/>
+              </a:lnSpc>
+            </a:pPr>
+            <a:r>
+              <a:rPr sz="1250" b="1">
+                <a:solidFill>
+                  <a:srgbClr val="E84A2F"/>
+                </a:solidFill>
+                <a:latin typeface="Segoe UI"/>
+              </a:rPr>
+              <a:t>•  Review &amp; send — Assets tab, copy, paste into Gmail/LinkedIn (Tue–Thu mornings).</a:t>
+            </a:r>
+          </a:p>
+          <a:p>
+            <a:pPr algn="l">
+              <a:lnSpc>
+                <a:spcPct val="105000"/>
+              </a:lnSpc>
+            </a:pPr>
+            <a:r>
+              <a:rPr sz="1250" b="1">
+                <a:solidFill>
+                  <a:srgbClr val="E84A2F"/>
+                </a:solidFill>
+                <a:latin typeface="Segoe UI"/>
+              </a:rPr>
+              <a:t>•  Log it — Approvals: mark sent.</a:t>
+            </a:r>
+          </a:p>
+          <a:p>
+            <a:pPr algn="l">
+              <a:lnSpc>
+                <a:spcPct val="105000"/>
+              </a:lnSpc>
+            </a:pPr>
+            <a:r>
+              <a:rPr sz="1250" b="1">
+                <a:solidFill>
+                  <a:srgbClr val="E84A2F"/>
+                </a:solidFill>
+                <a:latin typeface="Segoe UI"/>
+              </a:rPr>
+              <a:t>•  Listen — Tracker ‘Scan inbox’; associate unmatched.</a:t>
+            </a:r>
+          </a:p>
+          <a:p>
+            <a:pPr algn="l">
+              <a:lnSpc>
+                <a:spcPct val="105000"/>
+              </a:lnSpc>
+            </a:pPr>
+            <a:r>
+              <a:rPr sz="1250" b="1">
+                <a:solidFill>
+                  <a:srgbClr val="E84A2F"/>
+                </a:solidFill>
+                <a:latin typeface="Segoe UI"/>
+              </a:rPr>
+              <a:t>•  Act — read the digest; follow up on what’s due.</a:t>
+            </a:r>
+          </a:p>
+        </p:txBody>
+      </p:sp>
+    </p:spTree>
+  </p:cSld>
+  <p:clrMapOvr>
+    <a:masterClrMapping/>
+  </p:clrMapOvr>
+</p:sld>
+</file>
+
+<file path=ppt/slides/slide17.xml><?xml version="1.0" encoding="utf-8"?>
+<p:sld xmlns:a="http://schemas.openxmlformats.org/drawingml/2006/main" xmlns:p="http://schemas.openxmlformats.org/presentationml/2006/main" xmlns:r="http://schemas.openxmlformats.org/officeDocument/2006/relationships">
+  <p:cSld>
+    <p:spTree>
+      <p:nvGrpSpPr>
+        <p:cNvPr id="1" name=""/>
+        <p:cNvGrpSpPr/>
+        <p:nvPr/>
+      </p:nvGrpSpPr>
+      <p:grpSpPr/>
+      <p:sp>
+        <p:nvSpPr>
+          <p:cNvPr id="2" name="Rectangle 1"/>
+          <p:cNvSpPr/>
+          <p:nvPr/>
+        </p:nvSpPr>
+        <p:spPr>
+          <a:xfrm>
+            <a:off x="0" y="0"/>
+            <a:ext cx="12191695" cy="6858000"/>
+          </a:xfrm>
+          <a:prstGeom prst="rect">
+            <a:avLst/>
+          </a:prstGeom>
+          <a:solidFill>
+            <a:srgbClr val="1A1A2E"/>
+          </a:solidFill>
+          <a:ln>
+            <a:noFill/>
+          </a:ln>
+          <a:effectLst/>
+        </p:spPr>
+        <p:style>
+          <a:lnRef idx="1">
+            <a:schemeClr val="accent1"/>
+          </a:lnRef>
+          <a:fillRef idx="3">
+            <a:schemeClr val="accent1"/>
+          </a:fillRef>
+          <a:effectRef idx="2">
+            <a:schemeClr val="accent1"/>
+          </a:effectRef>
+          <a:fontRef idx="minor">
+            <a:schemeClr val="lt1"/>
+          </a:fontRef>
+        </p:style>
+        <p:txBody>
+          <a:bodyPr rtlCol="0" anchor="ctr"/>
+          <a:lstStyle/>
+          <a:p>
+            <a:pPr algn="ctr"/>
+          </a:p>
+        </p:txBody>
+      </p:sp>
+      <p:sp>
+        <p:nvSpPr>
+          <p:cNvPr id="3" name="Rectangle 2"/>
+          <p:cNvSpPr/>
+          <p:nvPr/>
+        </p:nvSpPr>
+        <p:spPr>
+          <a:xfrm>
+            <a:off x="0" y="0"/>
+            <a:ext cx="320040" cy="6858000"/>
+          </a:xfrm>
+          <a:prstGeom prst="rect">
+            <a:avLst/>
+          </a:prstGeom>
+          <a:solidFill>
+            <a:srgbClr val="E84A2F"/>
+          </a:solidFill>
+          <a:ln>
+            <a:noFill/>
+          </a:ln>
+          <a:effectLst/>
+        </p:spPr>
+        <p:style>
+          <a:lnRef idx="1">
+            <a:schemeClr val="accent1"/>
+          </a:lnRef>
+          <a:fillRef idx="3">
+            <a:schemeClr val="accent1"/>
+          </a:fillRef>
+          <a:effectRef idx="2">
+            <a:schemeClr val="accent1"/>
+          </a:effectRef>
+          <a:fontRef idx="minor">
+            <a:schemeClr val="lt1"/>
+          </a:fontRef>
+        </p:style>
+        <p:txBody>
+          <a:bodyPr rtlCol="0" anchor="ctr"/>
+          <a:lstStyle/>
+          <a:p>
+            <a:pPr algn="ctr"/>
+          </a:p>
+        </p:txBody>
+      </p:sp>
+      <p:sp>
+        <p:nvSpPr>
+          <p:cNvPr id="4" name="TextBox 3"/>
+          <p:cNvSpPr txBox="1"/>
+          <p:nvPr/>
+        </p:nvSpPr>
+        <p:spPr>
+          <a:xfrm>
+            <a:off x="822960" y="2194560"/>
+            <a:ext cx="10515600" cy="914400"/>
+          </a:xfrm>
+          <a:prstGeom prst="rect">
+            <a:avLst/>
+          </a:prstGeom>
+          <a:noFill/>
+        </p:spPr>
+        <p:txBody>
+          <a:bodyPr wrap="square" anchor="t" lIns="0" rIns="0" tIns="0" bIns="0">
+            <a:spAutoFit/>
+          </a:bodyPr>
+          <a:lstStyle/>
+          <a:p>
+            <a:pPr algn="l">
+              <a:lnSpc>
+                <a:spcPct val="100000"/>
+              </a:lnSpc>
+              <a:spcBef>
+                <a:spcPts val="0"/>
+              </a:spcBef>
+              <a:spcAft>
+                <a:spcPts val="400"/>
+              </a:spcAft>
+            </a:pPr>
+            <a:r>
+              <a:rPr sz="3400" b="1">
+                <a:solidFill>
+                  <a:srgbClr val="FFFFFF"/>
+                </a:solidFill>
+                <a:latin typeface="Segoe UI"/>
+              </a:rPr>
+              <a:t>You're ready to run PACOS.</a:t>
+            </a:r>
+          </a:p>
+        </p:txBody>
+      </p:sp>
+      <p:sp>
+        <p:nvSpPr>
+          <p:cNvPr id="5" name="TextBox 4"/>
+          <p:cNvSpPr txBox="1"/>
+          <p:nvPr/>
+        </p:nvSpPr>
+        <p:spPr>
+          <a:xfrm>
+            <a:off x="868680" y="3200400"/>
+            <a:ext cx="10332720" cy="1463040"/>
+          </a:xfrm>
+          <a:prstGeom prst="rect">
+            <a:avLst/>
+          </a:prstGeom>
+          <a:noFill/>
+        </p:spPr>
+        <p:txBody>
+          <a:bodyPr wrap="square" anchor="t" lIns="0" rIns="0" tIns="0" bIns="0">
+            <a:spAutoFit/>
+          </a:bodyPr>
+          <a:lstStyle/>
+          <a:p>
+            <a:pPr algn="l">
+              <a:lnSpc>
                 <a:spcPct val="120000"/>
               </a:lnSpc>
               <a:spcBef>
@@ -9060,17 +9377,11 @@
               <a:lnSpc>
                 <a:spcPct val="120000"/>
               </a:lnSpc>
-              <a:spcBef>
-                <a:spcPts val="0"/>
-              </a:spcBef>
-              <a:spcAft>
-                <a:spcPts val="600"/>
-              </a:spcAft>
-            </a:pPr>
-            <a:r>
-              <a:rPr sz="800" b="0">
-                <a:solidFill>
-                  <a:srgbClr val="FFFFFF"/>
+            </a:pPr>
+            <a:r>
+              <a:rPr sz="1700" b="0">
+                <a:solidFill>
+                  <a:srgbClr val="CFCFE0"/>
                 </a:solidFill>
                 <a:latin typeface="Segoe UI"/>
               </a:rPr>
@@ -9082,21 +9393,15 @@
               <a:lnSpc>
                 <a:spcPct val="120000"/>
               </a:lnSpc>
-              <a:spcBef>
-                <a:spcPts val="0"/>
-              </a:spcBef>
-              <a:spcAft>
-                <a:spcPts val="600"/>
-              </a:spcAft>
-            </a:pPr>
-            <a:r>
-              <a:rPr sz="1500" b="0">
-                <a:solidFill>
-                  <a:srgbClr val="9A9AB8"/>
-                </a:solidFill>
-                <a:latin typeface="Segoe UI"/>
-              </a:rPr>
-              <a:t>Start the servers, open localhost:5173, and click ‘Generate with Nemotron’.</a:t>
+            </a:pPr>
+            <a:r>
+              <a:rPr sz="1700" b="0">
+                <a:solidFill>
+                  <a:srgbClr val="CFCFE0"/>
+                </a:solidFill>
+                <a:latin typeface="Segoe UI"/>
+              </a:rPr>
+              <a:t>Double-click PACOS.exe — it opens the dashboard for you. Then click ‘Generate with Nemotron’.</a:t>
             </a:r>
           </a:p>
         </p:txBody>
@@ -9516,7 +9821,7 @@
                 </a:solidFill>
                 <a:latin typeface="Segoe UI"/>
               </a:rPr>
-              <a:t>PACOS turns a manual job search into a small, local pipeline. It generates personalised outreach for each lead, watches your Gmail for recruiter signals, and keeps one live tracker so nothing slips.</a:t>
+              <a:t>PACOS turns a manual job search into a small, local pipeline. It generates personalised outreach for each lead, captures new leads from a pasted JD or a chat message, watches your Gmail for recruiter signals, and keeps one live tracker so nothing slips.</a:t>
             </a:r>
           </a:p>
         </p:txBody>
@@ -9609,16 +9914,7 @@
                 </a:solidFill>
                 <a:latin typeface="Segoe UI"/>
               </a:rPr>
-              <a:t>⚑  The golden rule: PACOS never sends anything. </a:t>
-            </a:r>
-            <a:r>
-              <a:rPr sz="1400" b="0">
-                <a:solidFill>
-                  <a:srgbClr val="1A1A2E"/>
-                </a:solidFill>
-                <a:latin typeface="Segoe UI"/>
-              </a:rPr>
-              <a:t>It writes the messages; you review, copy, and send them yourself. The inbox monitor is strictly read-only.</a:t>
+              <a:t>⚑  The golden rules: PACOS never sends anything — you review, copy, and send yourself. The inbox monitor is strictly read-only. And nothing model-proposed is ever saved without your confirmation — the JD parser and chat only propose leads; you approve each one.</a:t>
             </a:r>
           </a:p>
         </p:txBody>
@@ -10637,21 +10933,15 @@
               <a:lnSpc>
                 <a:spcPct val="100000"/>
               </a:lnSpc>
-              <a:spcBef>
-                <a:spcPts val="0"/>
-              </a:spcBef>
-              <a:spcAft>
-                <a:spcPts val="200"/>
-              </a:spcAft>
-            </a:pPr>
-            <a:r>
-              <a:rPr sz="950" b="0">
-                <a:solidFill>
-                  <a:srgbClr val="CFCFE0"/>
-                </a:solidFill>
-                <a:latin typeface="Segoe UI"/>
-              </a:rPr>
-              <a:t>localhost:5173</a:t>
+            </a:pPr>
+            <a:r>
+              <a:rPr sz="1300" b="1">
+                <a:solidFill>
+                  <a:srgbClr val="FFFFFF"/>
+                </a:solidFill>
+                <a:latin typeface="Segoe UI"/>
+              </a:rPr>
+              <a:t>served by the backend — or just PACOS.exe</a:t>
             </a:r>
           </a:p>
         </p:txBody>
@@ -10752,17 +11042,11 @@
               <a:lnSpc>
                 <a:spcPct val="100000"/>
               </a:lnSpc>
-              <a:spcBef>
-                <a:spcPts val="0"/>
-              </a:spcBef>
-              <a:spcAft>
-                <a:spcPts val="200"/>
-              </a:spcAft>
-            </a:pPr>
-            <a:r>
-              <a:rPr sz="950" b="0">
-                <a:solidFill>
-                  <a:srgbClr val="CFCFE0"/>
+            </a:pPr>
+            <a:r>
+              <a:rPr sz="1300" b="1">
+                <a:solidFill>
+                  <a:srgbClr val="FFFFFF"/>
                 </a:solidFill>
                 <a:latin typeface="Segoe UI"/>
               </a:rPr>
@@ -14533,39 +14817,31 @@
               <a:lnSpc>
                 <a:spcPct val="105000"/>
               </a:lnSpc>
-              <a:spcBef>
-                <a:spcPts val="0"/>
-              </a:spcBef>
-              <a:spcAft>
-                <a:spcPts val="400"/>
-              </a:spcAft>
-            </a:pPr>
-            <a:r>
-              <a:rPr sz="1250" b="1">
+            </a:pPr>
+            <a:r>
+              <a:rPr sz="1300" b="1">
                 <a:solidFill>
                   <a:srgbClr val="1A1A2E"/>
                 </a:solidFill>
                 <a:latin typeface="Segoe UI"/>
               </a:rPr>
-              <a:t>•  Explicitly — </a:t>
-            </a:r>
-            <a:r>
-              <a:rPr sz="1200" b="0">
-                <a:solidFill>
-                  <a:srgbClr val="E84A2F"/>
-                </a:solidFill>
-                <a:latin typeface="Consolas"/>
-              </a:rPr>
-              <a:t>pacos ingest</a:t>
-            </a:r>
-            <a:r>
-              <a:rPr sz="1250" b="0">
+              <a:t>•  Explicitly — pacos ingest loads leads.csv into the DB.</a:t>
+            </a:r>
+          </a:p>
+          <a:p>
+            <a:pPr algn="l">
+              <a:lnSpc>
+                <a:spcPct val="105000"/>
+              </a:lnSpc>
+            </a:pPr>
+            <a:r>
+              <a:rPr sz="1300" b="1">
                 <a:solidFill>
                   <a:srgbClr val="1A1A2E"/>
                 </a:solidFill>
                 <a:latin typeface="Segoe UI"/>
               </a:rPr>
-              <a:t>   loads leads.csv into the DB.</a:t>
+              <a:t>•  Automatically — backend/CLI auto-ingest on first run; re-ingested before every generate.</a:t>
             </a:r>
           </a:p>
           <a:p>
@@ -14573,61 +14849,15 @@
               <a:lnSpc>
                 <a:spcPct val="105000"/>
               </a:lnSpc>
-              <a:spcBef>
-                <a:spcPts val="0"/>
-              </a:spcBef>
-              <a:spcAft>
-                <a:spcPts val="400"/>
-              </a:spcAft>
-            </a:pPr>
-            <a:r>
-              <a:rPr sz="1250" b="1">
+            </a:pPr>
+            <a:r>
+              <a:rPr sz="1300" b="1">
                 <a:solidFill>
                   <a:srgbClr val="1A1A2E"/>
                 </a:solidFill>
                 <a:latin typeface="Segoe UI"/>
               </a:rPr>
-              <a:t>•  Automatically — </a:t>
-            </a:r>
-            <a:r>
-              <a:rPr sz="1250" b="0">
-                <a:solidFill>
-                  <a:srgbClr val="1A1A2E"/>
-                </a:solidFill>
-                <a:latin typeface="Segoe UI"/>
-              </a:rPr>
-              <a:t>the CLI and backend auto-ingest on first run if the DB is empty.</a:t>
-            </a:r>
-          </a:p>
-          <a:p>
-            <a:pPr algn="l">
-              <a:lnSpc>
-                <a:spcPct val="105000"/>
-              </a:lnSpc>
-              <a:spcBef>
-                <a:spcPts val="0"/>
-              </a:spcBef>
-              <a:spcAft>
-                <a:spcPts val="400"/>
-              </a:spcAft>
-            </a:pPr>
-            <a:r>
-              <a:rPr sz="1250" b="1">
-                <a:solidFill>
-                  <a:srgbClr val="1A1A2E"/>
-                </a:solidFill>
-                <a:latin typeface="Segoe UI"/>
-              </a:rPr>
-              <a:t>•  Before every generate — </a:t>
-            </a:r>
-            <a:r>
-              <a:rPr sz="1250" b="0">
-                <a:solidFill>
-                  <a:srgbClr val="1A1A2E"/>
-                </a:solidFill>
-                <a:latin typeface="Segoe UI"/>
-              </a:rPr>
-              <a:t>re-ingests so edits to leads.csv are picked up. Upsert-by-lead_id means no duplicates and tracker state is preserved.</a:t>
+              <a:t>•  From the UI — the Leads form writes a lead directly; the JD parser and the chat propose one, and it is written only after you review and confirm.</a:t>
             </a:r>
           </a:p>
         </p:txBody>
@@ -15889,7 +16119,7 @@
                 </a:solidFill>
                 <a:latin typeface="Segoe UI"/>
               </a:rPr>
-              <a:t>Two small servers. Start each in its own terminal, then open the browser. Prefer the CLI? Skip both and use pacos commands directly.</a:t>
+              <a:t>One double-click. PACOS.exe runs everything as a single process (API + dashboard) and opens your browser. The two-server dev mode still exists for coding sessions.</a:t>
             </a:r>
           </a:p>
         </p:txBody>
@@ -15980,7 +16210,7 @@
                 </a:solidFill>
                 <a:latin typeface="Segoe UI"/>
               </a:rPr>
-              <a:t>backend</a:t>
+              <a:t>easiest — the packaged app</a:t>
             </a:r>
           </a:p>
           <a:p>
@@ -15988,21 +16218,15 @@
               <a:lnSpc>
                 <a:spcPct val="100000"/>
               </a:lnSpc>
-              <a:spcBef>
-                <a:spcPts val="0"/>
-              </a:spcBef>
-              <a:spcAft>
-                <a:spcPts val="200"/>
-              </a:spcAft>
-            </a:pPr>
-            <a:r>
-              <a:rPr sz="1100" b="0">
-                <a:solidFill>
-                  <a:srgbClr val="D6D6E6"/>
-                </a:solidFill>
-                <a:latin typeface="Consolas"/>
-              </a:rPr>
-              <a:t># terminal 1 — backend (API)</a:t>
+            </a:pPr>
+            <a:r>
+              <a:rPr sz="1000" b="1">
+                <a:solidFill>
+                  <a:srgbClr val="8A8AB0"/>
+                </a:solidFill>
+                <a:latin typeface="Segoe UI"/>
+              </a:rPr>
+              <a:t>Double-click  pacos\PACOS.exe</a:t>
             </a:r>
           </a:p>
           <a:p>
@@ -16010,21 +16234,15 @@
               <a:lnSpc>
                 <a:spcPct val="100000"/>
               </a:lnSpc>
-              <a:spcBef>
-                <a:spcPts val="0"/>
-              </a:spcBef>
-              <a:spcAft>
-                <a:spcPts val="200"/>
-              </a:spcAft>
-            </a:pPr>
-            <a:r>
-              <a:rPr sz="1100" b="0">
-                <a:solidFill>
-                  <a:srgbClr val="D6D6E6"/>
-                </a:solidFill>
-                <a:latin typeface="Consolas"/>
-              </a:rPr>
-              <a:t>.venv\Scripts\python -m uvicorn \</a:t>
+            </a:pPr>
+            <a:r>
+              <a:rPr sz="1000" b="1">
+                <a:solidFill>
+                  <a:srgbClr val="8A8AB0"/>
+                </a:solidFill>
+                <a:latin typeface="Segoe UI"/>
+              </a:rPr>
+              <a:t># picks a free port (8000+), opens the browser</a:t>
             </a:r>
           </a:p>
           <a:p>
@@ -16032,21 +16250,31 @@
               <a:lnSpc>
                 <a:spcPct val="100000"/>
               </a:lnSpc>
-              <a:spcBef>
-                <a:spcPts val="0"/>
-              </a:spcBef>
-              <a:spcAft>
-                <a:spcPts val="200"/>
-              </a:spcAft>
-            </a:pPr>
-            <a:r>
-              <a:rPr sz="1100" b="0">
-                <a:solidFill>
-                  <a:srgbClr val="D6D6E6"/>
-                </a:solidFill>
-                <a:latin typeface="Consolas"/>
-              </a:rPr>
-              <a:t>     backend.main:app --port 8000</a:t>
+            </a:pPr>
+            <a:r>
+              <a:rPr sz="1000" b="1">
+                <a:solidFill>
+                  <a:srgbClr val="8A8AB0"/>
+                </a:solidFill>
+                <a:latin typeface="Segoe UI"/>
+              </a:rPr>
+              <a:t># close the console window to stop</a:t>
+            </a:r>
+          </a:p>
+          <a:p>
+            <a:pPr algn="l">
+              <a:lnSpc>
+                <a:spcPct val="100000"/>
+              </a:lnSpc>
+            </a:pPr>
+            <a:r>
+              <a:rPr sz="1000" b="1">
+                <a:solidFill>
+                  <a:srgbClr val="8A8AB0"/>
+                </a:solidFill>
+                <a:latin typeface="Segoe UI"/>
+              </a:rPr>
+              <a:t># rebuild after code changes: build_exe.bat</a:t>
             </a:r>
           </a:p>
         </p:txBody>
@@ -16137,7 +16365,7 @@
                 </a:solidFill>
                 <a:latin typeface="Segoe UI"/>
               </a:rPr>
-              <a:t>frontend</a:t>
+              <a:t>dev mode — hot reload</a:t>
             </a:r>
           </a:p>
           <a:p>
@@ -16145,21 +16373,15 @@
               <a:lnSpc>
                 <a:spcPct val="100000"/>
               </a:lnSpc>
-              <a:spcBef>
-                <a:spcPts val="0"/>
-              </a:spcBef>
-              <a:spcAft>
-                <a:spcPts val="200"/>
-              </a:spcAft>
-            </a:pPr>
-            <a:r>
-              <a:rPr sz="1100" b="0">
-                <a:solidFill>
-                  <a:srgbClr val="D6D6E6"/>
-                </a:solidFill>
-                <a:latin typeface="Consolas"/>
-              </a:rPr>
-              <a:t># terminal 2 — frontend (dashboard)</a:t>
+            </a:pPr>
+            <a:r>
+              <a:rPr sz="1000" b="1">
+                <a:solidFill>
+                  <a:srgbClr val="8A8AB0"/>
+                </a:solidFill>
+                <a:latin typeface="Segoe UI"/>
+              </a:rPr>
+              <a:t># terminal 1</a:t>
             </a:r>
           </a:p>
           <a:p>
@@ -16167,21 +16389,15 @@
               <a:lnSpc>
                 <a:spcPct val="100000"/>
               </a:lnSpc>
-              <a:spcBef>
-                <a:spcPts val="0"/>
-              </a:spcBef>
-              <a:spcAft>
-                <a:spcPts val="200"/>
-              </a:spcAft>
-            </a:pPr>
-            <a:r>
-              <a:rPr sz="1100" b="0">
-                <a:solidFill>
-                  <a:srgbClr val="D6D6E6"/>
-                </a:solidFill>
-                <a:latin typeface="Consolas"/>
-              </a:rPr>
-              <a:t>cd frontend</a:t>
+            </a:pPr>
+            <a:r>
+              <a:rPr sz="1000" b="1">
+                <a:solidFill>
+                  <a:srgbClr val="8A8AB0"/>
+                </a:solidFill>
+                <a:latin typeface="Segoe UI"/>
+              </a:rPr>
+              <a:t>.venv\Scripts\python -m uvicorn backend.main:app --port 8000</a:t>
             </a:r>
           </a:p>
           <a:p>
@@ -16189,21 +16405,15 @@
               <a:lnSpc>
                 <a:spcPct val="100000"/>
               </a:lnSpc>
-              <a:spcBef>
-                <a:spcPts val="0"/>
-              </a:spcBef>
-              <a:spcAft>
-                <a:spcPts val="200"/>
-              </a:spcAft>
-            </a:pPr>
-            <a:r>
-              <a:rPr sz="1100" b="0">
-                <a:solidFill>
-                  <a:srgbClr val="D6D6E6"/>
-                </a:solidFill>
-                <a:latin typeface="Consolas"/>
-              </a:rPr>
-              <a:t>npm install     # first time only</a:t>
+            </a:pPr>
+            <a:r>
+              <a:rPr sz="1000" b="1">
+                <a:solidFill>
+                  <a:srgbClr val="8A8AB0"/>
+                </a:solidFill>
+                <a:latin typeface="Segoe UI"/>
+              </a:rPr>
+              <a:t># terminal 2</a:t>
             </a:r>
           </a:p>
           <a:p>
@@ -16211,21 +16421,15 @@
               <a:lnSpc>
                 <a:spcPct val="100000"/>
               </a:lnSpc>
-              <a:spcBef>
-                <a:spcPts val="0"/>
-              </a:spcBef>
-              <a:spcAft>
-                <a:spcPts val="200"/>
-              </a:spcAft>
-            </a:pPr>
-            <a:r>
-              <a:rPr sz="1100" b="0">
-                <a:solidFill>
-                  <a:srgbClr val="D6D6E6"/>
-                </a:solidFill>
-                <a:latin typeface="Consolas"/>
-              </a:rPr>
-              <a:t>npm run dev</a:t>
+            </a:pPr>
+            <a:r>
+              <a:rPr sz="1000" b="1">
+                <a:solidFill>
+                  <a:srgbClr val="8A8AB0"/>
+                </a:solidFill>
+                <a:latin typeface="Segoe UI"/>
+              </a:rPr>
+              <a:t>cd frontend &amp;&amp; npm run dev   → localhost:5173</a:t>
             </a:r>
           </a:p>
         </p:txBody>
@@ -16318,29 +16522,7 @@
                 </a:solidFill>
                 <a:latin typeface="Segoe UI"/>
               </a:rPr>
-              <a:t>Then open  →  http://localhost:5173</a:t>
-            </a:r>
-          </a:p>
-          <a:p>
-            <a:pPr algn="ctr">
-              <a:lnSpc>
-                <a:spcPct val="100000"/>
-              </a:lnSpc>
-              <a:spcBef>
-                <a:spcPts val="0"/>
-              </a:spcBef>
-              <a:spcAft>
-                <a:spcPts val="200"/>
-              </a:spcAft>
-            </a:pPr>
-            <a:r>
-              <a:rPr sz="950" b="0">
-                <a:solidFill>
-                  <a:srgbClr val="CFCFE0"/>
-                </a:solidFill>
-                <a:latin typeface="Segoe UI"/>
-              </a:rPr>
-              <a:t>the dashboard proxies to the backend automatically</a:t>
+              <a:t>The exe opens the browser for you — the folder PACOS.exe sits in is its workspace (.env, data\leads.csv, tracker.db, output\ live there)</a:t>
             </a:r>
           </a:p>
         </p:txBody>
@@ -16385,7 +16567,7 @@
                 </a:solidFill>
                 <a:latin typeface="Segoe UI"/>
               </a:rPr>
-              <a:t>The five tabs, left to right, are the workflow:</a:t>
+              <a:t>The seven tabs, left to right, are the workflow:</a:t>
             </a:r>
           </a:p>
           <a:p>
@@ -16393,21 +16575,15 @@
               <a:lnSpc>
                 <a:spcPct val="110000"/>
               </a:lnSpc>
-              <a:spcBef>
-                <a:spcPts val="0"/>
-              </a:spcBef>
-              <a:spcAft>
-                <a:spcPts val="800"/>
-              </a:spcAft>
-            </a:pPr>
-            <a:r>
-              <a:rPr sz="1500" b="1">
-                <a:solidFill>
-                  <a:srgbClr val="E84A2F"/>
-                </a:solidFill>
-                <a:latin typeface="Segoe UI"/>
-              </a:rPr>
-              <a:t>Dashboard → Leads → Assets → Approvals → Tracker</a:t>
+            </a:pPr>
+            <a:r>
+              <a:rPr sz="1400" b="1">
+                <a:solidFill>
+                  <a:srgbClr val="1A1A2E"/>
+                </a:solidFill>
+                <a:latin typeface="Segoe UI"/>
+              </a:rPr>
+              <a:t>Dashboard → Leads → Assets → Approvals → Tracker → Chat → Discovery</a:t>
             </a:r>
           </a:p>
           <a:p>
@@ -16415,21 +16591,15 @@
               <a:lnSpc>
                 <a:spcPct val="110000"/>
               </a:lnSpc>
-              <a:spcBef>
-                <a:spcPts val="0"/>
-              </a:spcBef>
-              <a:spcAft>
-                <a:spcPts val="800"/>
-              </a:spcAft>
-            </a:pPr>
-            <a:r>
-              <a:rPr sz="1300" b="0">
-                <a:solidFill>
-                  <a:srgbClr val="6B6B7B"/>
-                </a:solidFill>
-                <a:latin typeface="Segoe UI"/>
-              </a:rPr>
-              <a:t>Generate outreach, review it, mark what you sent, and watch the pipeline — in that order.</a:t>
+            </a:pPr>
+            <a:r>
+              <a:rPr sz="1400" b="1">
+                <a:solidFill>
+                  <a:srgbClr val="1A1A2E"/>
+                </a:solidFill>
+                <a:latin typeface="Segoe UI"/>
+              </a:rPr>
+              <a:t>Generate outreach, review it, log what you sent, watch the pipeline — and capture new leads by chat.</a:t>
             </a:r>
           </a:p>
         </p:txBody>
@@ -17762,25 +17932,23 @@
                 </a:solidFill>
                 <a:latin typeface="Segoe UI"/>
               </a:rPr>
-              <a:t>•  </a:t>
-            </a:r>
+              <a:t>•  Leads tab — every lead with its domain tone, channel, and (for enriched leads) a predicted email + confidence. Click a row for its assets.</a:t>
+            </a:r>
+          </a:p>
+          <a:p>
+            <a:pPr algn="l">
+              <a:lnSpc>
+                <a:spcPct val="105000"/>
+              </a:lnSpc>
+            </a:pPr>
             <a:r>
               <a:rPr sz="1350" b="1">
                 <a:solidFill>
-                  <a:srgbClr val="1A1A2E"/>
-                </a:solidFill>
-                <a:latin typeface="Segoe UI"/>
-              </a:rPr>
-              <a:t>Leads tab </a:t>
-            </a:r>
-            <a:r>
-              <a:rPr sz="1350" b="0">
-                <a:solidFill>
-                  <a:srgbClr val="1A1A2E"/>
-                </a:solidFill>
-                <a:latin typeface="Segoe UI"/>
-              </a:rPr>
-              <a:t>— every lead with its auto domain tone and channel (email+dm or dm-only). Click a row to jump to its assets.</a:t>
+                  <a:srgbClr val="E84A2F"/>
+                </a:solidFill>
+                <a:latin typeface="Segoe UI"/>
+              </a:rPr>
+              <a:t>•  + Add lead from JD — paste a job description; Nemotron extracts the contact, company and persona; you review, edit, and confirm.</a:t>
             </a:r>
           </a:p>
           <a:p>
@@ -17788,12 +17956,6 @@
               <a:lnSpc>
                 <a:spcPct val="105000"/>
               </a:lnSpc>
-              <a:spcBef>
-                <a:spcPts val="0"/>
-              </a:spcBef>
-              <a:spcAft>
-                <a:spcPts val="1100"/>
-              </a:spcAft>
             </a:pPr>
             <a:r>
               <a:rPr sz="1350" b="1">
@@ -17802,25 +17964,23 @@
                 </a:solidFill>
                 <a:latin typeface="Segoe UI"/>
               </a:rPr>
-              <a:t>•  </a:t>
-            </a:r>
+              <a:t>•  + Add lead manually — a plain form; what you type goes straight into leads.csv.</a:t>
+            </a:r>
+          </a:p>
+          <a:p>
+            <a:pPr algn="l">
+              <a:lnSpc>
+                <a:spcPct val="105000"/>
+              </a:lnSpc>
+            </a:pPr>
             <a:r>
               <a:rPr sz="1350" b="1">
                 <a:solidFill>
-                  <a:srgbClr val="1A1A2E"/>
-                </a:solidFill>
-                <a:latin typeface="Segoe UI"/>
-              </a:rPr>
-              <a:t>Assets tab </a:t>
-            </a:r>
-            <a:r>
-              <a:rPr sz="1350" b="0">
-                <a:solidFill>
-                  <a:srgbClr val="1A1A2E"/>
-                </a:solidFill>
-                <a:latin typeface="Segoe UI"/>
-              </a:rPr>
-              <a:t>— pick a lead, read the four generated files, and hit Copy.</a:t>
+                  <a:srgbClr val="E84A2F"/>
+                </a:solidFill>
+                <a:latin typeface="Segoe UI"/>
+              </a:rPr>
+              <a:t>•  Assets tab — pick a lead, read the four generated files, hit Copy. You paste and send yourself — PACOS never sends.</a:t>
             </a:r>
           </a:p>
           <a:p>
@@ -17828,12 +17988,6 @@
               <a:lnSpc>
                 <a:spcPct val="105000"/>
               </a:lnSpc>
-              <a:spcBef>
-                <a:spcPts val="0"/>
-              </a:spcBef>
-              <a:spcAft>
-                <a:spcPts val="1100"/>
-              </a:spcAft>
             </a:pPr>
             <a:r>
               <a:rPr sz="1350" b="1">
@@ -17842,105 +17996,7 @@
                 </a:solidFill>
                 <a:latin typeface="Segoe UI"/>
               </a:rPr>
-              <a:t>•  </a:t>
-            </a:r>
-            <a:r>
-              <a:rPr sz="1350" b="1">
-                <a:solidFill>
-                  <a:srgbClr val="1A1A2E"/>
-                </a:solidFill>
-                <a:latin typeface="Segoe UI"/>
-              </a:rPr>
-              <a:t>This is the send step </a:t>
-            </a:r>
-            <a:r>
-              <a:rPr sz="1350" b="0">
-                <a:solidFill>
-                  <a:srgbClr val="1A1A2E"/>
-                </a:solidFill>
-                <a:latin typeface="Segoe UI"/>
-              </a:rPr>
-              <a:t>— you paste the copied text into Gmail or LinkedIn yourself. PACOS never sends.</a:t>
-            </a:r>
-          </a:p>
-          <a:p>
-            <a:pPr algn="l">
-              <a:lnSpc>
-                <a:spcPct val="105000"/>
-              </a:lnSpc>
-              <a:spcBef>
-                <a:spcPts val="0"/>
-              </a:spcBef>
-              <a:spcAft>
-                <a:spcPts val="1100"/>
-              </a:spcAft>
-            </a:pPr>
-            <a:r>
-              <a:rPr sz="1350" b="1">
-                <a:solidFill>
-                  <a:srgbClr val="E84A2F"/>
-                </a:solidFill>
-                <a:latin typeface="Segoe UI"/>
-              </a:rPr>
-              <a:t>•  </a:t>
-            </a:r>
-            <a:r>
-              <a:rPr sz="1350" b="1">
-                <a:solidFill>
-                  <a:srgbClr val="1A1A2E"/>
-                </a:solidFill>
-                <a:latin typeface="Segoe UI"/>
-              </a:rPr>
-              <a:t>Coherence </a:t>
-            </a:r>
-            <a:r>
-              <a:rPr sz="1350" b="0">
-                <a:solidFill>
-                  <a:srgbClr val="1A1A2E"/>
-                </a:solidFill>
-                <a:latin typeface="Segoe UI"/>
-              </a:rPr>
-              <a:t>— all four assets open on the same personalised hook.</a:t>
-            </a:r>
-          </a:p>
-          <a:p>
-            <a:pPr algn="l">
-              <a:lnSpc>
-                <a:spcPct val="105000"/>
-              </a:lnSpc>
-              <a:spcBef>
-                <a:spcPts val="0"/>
-              </a:spcBef>
-              <a:spcAft>
-                <a:spcPts val="1100"/>
-              </a:spcAft>
-            </a:pPr>
-            <a:r>
-              <a:rPr sz="1350" b="1">
-                <a:solidFill>
-                  <a:srgbClr val="E84A2F"/>
-                </a:solidFill>
-                <a:latin typeface="Segoe UI"/>
-              </a:rPr>
-              <a:t>•  </a:t>
-            </a:r>
-            <a:r>
-              <a:rPr sz="1350" b="1">
-                <a:solidFill>
-                  <a:srgbClr val="1A1A2E"/>
-                </a:solidFill>
-                <a:latin typeface="Segoe UI"/>
-              </a:rPr>
-              <a:t>Always read before sending </a:t>
-            </a:r>
-            <a:r>
-              <a:rPr sz="1350" b="0">
-                <a:solidFill>
-                  <a:srgbClr val="1A1A2E"/>
-                </a:solidFill>
-                <a:latin typeface="Segoe UI"/>
-              </a:rPr>
-              <a:t>— the model can occasionally embellish; you are the last check.</a:t>
+              <a:t>•  Always read before sending — you are the last check.</a:t>
             </a:r>
           </a:p>
         </p:txBody>
